--- a/komeiji_koishi/background.pptx
+++ b/komeiji_koishi/background.pptx
@@ -3499,7 +3499,7 @@
         </p:nvSpPr>
         <p:spPr>
           <a:xfrm>
-            <a:off x="6381049" y="5183246"/>
+            <a:off x="6381049" y="1104979"/>
             <a:ext cx="4348955" cy="646331"/>
           </a:xfrm>
           <a:prstGeom prst="rect">
@@ -3610,10 +3610,10 @@
       </p:sp>
       <p:sp>
         <p:nvSpPr>
-          <p:cNvPr id="17" name="文本框 16">
-            <a:extLst>
-              <a:ext uri="{FF2B5EF4-FFF2-40B4-BE49-F238E27FC236}">
-                <a16:creationId xmlns:a16="http://schemas.microsoft.com/office/drawing/2014/main" id="{B96459A3-8C97-40A0-E660-EB7988CF1CF9}"/>
+          <p:cNvPr id="5" name="文本框 4">
+            <a:extLst>
+              <a:ext uri="{FF2B5EF4-FFF2-40B4-BE49-F238E27FC236}">
+                <a16:creationId xmlns:a16="http://schemas.microsoft.com/office/drawing/2014/main" id="{DFB37C91-03C4-2957-12F9-2F7E89E41B7A}"/>
               </a:ext>
             </a:extLst>
           </p:cNvPr>
@@ -3622,8 +3622,8 @@
         </p:nvSpPr>
         <p:spPr>
           <a:xfrm>
-            <a:off x="6707457" y="1144383"/>
-            <a:ext cx="1380144" cy="1384995"/>
+            <a:off x="6800818" y="5363193"/>
+            <a:ext cx="948431" cy="276999"/>
           </a:xfrm>
           <a:prstGeom prst="rect">
             <a:avLst/>
@@ -3637,7 +3637,7 @@
           <a:lstStyle/>
           <a:p>
             <a:r>
-              <a:rPr lang="en-US" altLang="zh-CN" sz="1400" dirty="0">
+              <a:rPr lang="en-US" altLang="zh-CN" sz="1200" dirty="0">
                 <a:solidFill>
                   <a:schemeClr val="bg1"/>
                 </a:solidFill>
@@ -3648,9 +3648,206 @@
               <a:t>F1:Help</a:t>
             </a:r>
           </a:p>
-          <a:p>
-            <a:r>
-              <a:rPr lang="en-US" altLang="zh-CN" sz="1400" dirty="0">
+        </p:txBody>
+      </p:sp>
+      <p:sp>
+        <p:nvSpPr>
+          <p:cNvPr id="13" name="文本框 12">
+            <a:extLst>
+              <a:ext uri="{FF2B5EF4-FFF2-40B4-BE49-F238E27FC236}">
+                <a16:creationId xmlns:a16="http://schemas.microsoft.com/office/drawing/2014/main" id="{6A44683E-1C3F-B711-71D9-71DCA958E15A}"/>
+              </a:ext>
+            </a:extLst>
+          </p:cNvPr>
+          <p:cNvSpPr txBox="1"/>
+          <p:nvPr/>
+        </p:nvSpPr>
+        <p:spPr>
+          <a:xfrm>
+            <a:off x="6795236" y="5588525"/>
+            <a:ext cx="1478595" cy="276999"/>
+          </a:xfrm>
+          <a:prstGeom prst="rect">
+            <a:avLst/>
+          </a:prstGeom>
+          <a:noFill/>
+        </p:spPr>
+        <p:txBody>
+          <a:bodyPr wrap="square" rtlCol="0">
+            <a:spAutoFit/>
+          </a:bodyPr>
+          <a:lstStyle/>
+          <a:p>
+            <a:r>
+              <a:rPr lang="en-US" altLang="zh-CN" sz="1200" dirty="0">
+                <a:solidFill>
+                  <a:schemeClr val="bg1"/>
+                </a:solidFill>
+                <a:latin typeface="Comic Sans MS" panose="030F0702030302020204" pitchFamily="66" charset="0"/>
+                <a:ea typeface="MS PGothic" panose="020B0600070205080204" pitchFamily="34" charset="-128"/>
+                <a:cs typeface="Cascadia Code" panose="020B0609020000020004" pitchFamily="49" charset="0"/>
+              </a:rPr>
+              <a:t>F4:Localboot</a:t>
+            </a:r>
+          </a:p>
+        </p:txBody>
+      </p:sp>
+      <p:sp>
+        <p:nvSpPr>
+          <p:cNvPr id="16" name="文本框 15">
+            <a:extLst>
+              <a:ext uri="{FF2B5EF4-FFF2-40B4-BE49-F238E27FC236}">
+                <a16:creationId xmlns:a16="http://schemas.microsoft.com/office/drawing/2014/main" id="{A88CC978-E024-38FB-DF3A-906CB2C6F8C9}"/>
+              </a:ext>
+            </a:extLst>
+          </p:cNvPr>
+          <p:cNvSpPr txBox="1"/>
+          <p:nvPr/>
+        </p:nvSpPr>
+        <p:spPr>
+          <a:xfrm>
+            <a:off x="8021196" y="5588525"/>
+            <a:ext cx="948431" cy="276999"/>
+          </a:xfrm>
+          <a:prstGeom prst="rect">
+            <a:avLst/>
+          </a:prstGeom>
+          <a:noFill/>
+        </p:spPr>
+        <p:txBody>
+          <a:bodyPr wrap="square" rtlCol="0">
+            <a:spAutoFit/>
+          </a:bodyPr>
+          <a:lstStyle/>
+          <a:p>
+            <a:r>
+              <a:rPr lang="en-US" altLang="zh-CN" sz="1200" dirty="0">
+                <a:solidFill>
+                  <a:schemeClr val="bg1"/>
+                </a:solidFill>
+                <a:latin typeface="Comic Sans MS" panose="030F0702030302020204" pitchFamily="66" charset="0"/>
+                <a:ea typeface="MS PGothic" panose="020B0600070205080204" pitchFamily="34" charset="-128"/>
+                <a:cs typeface="Cascadia Code" panose="020B0609020000020004" pitchFamily="49" charset="0"/>
+              </a:rPr>
+              <a:t>F5:Tools</a:t>
+            </a:r>
+          </a:p>
+        </p:txBody>
+      </p:sp>
+      <p:sp>
+        <p:nvSpPr>
+          <p:cNvPr id="19" name="文本框 18">
+            <a:extLst>
+              <a:ext uri="{FF2B5EF4-FFF2-40B4-BE49-F238E27FC236}">
+                <a16:creationId xmlns:a16="http://schemas.microsoft.com/office/drawing/2014/main" id="{5327B0BC-5D3A-CAA0-A440-DDD341E86C80}"/>
+              </a:ext>
+            </a:extLst>
+          </p:cNvPr>
+          <p:cNvSpPr txBox="1"/>
+          <p:nvPr/>
+        </p:nvSpPr>
+        <p:spPr>
+          <a:xfrm>
+            <a:off x="9110302" y="5363193"/>
+            <a:ext cx="1374810" cy="276999"/>
+          </a:xfrm>
+          <a:prstGeom prst="rect">
+            <a:avLst/>
+          </a:prstGeom>
+          <a:noFill/>
+        </p:spPr>
+        <p:txBody>
+          <a:bodyPr wrap="square" rtlCol="0">
+            <a:spAutoFit/>
+          </a:bodyPr>
+          <a:lstStyle/>
+          <a:p>
+            <a:r>
+              <a:rPr lang="en-US" altLang="zh-CN" sz="1200" dirty="0">
+                <a:solidFill>
+                  <a:schemeClr val="bg1"/>
+                </a:solidFill>
+                <a:latin typeface="Comic Sans MS" panose="030F0702030302020204" pitchFamily="66" charset="0"/>
+                <a:ea typeface="MS PGothic" panose="020B0600070205080204" pitchFamily="34" charset="-128"/>
+                <a:cs typeface="Cascadia Code" panose="020B0609020000020004" pitchFamily="49" charset="0"/>
+              </a:rPr>
+              <a:t>F3:Treeview</a:t>
+            </a:r>
+          </a:p>
+        </p:txBody>
+      </p:sp>
+      <p:sp>
+        <p:nvSpPr>
+          <p:cNvPr id="21" name="文本框 20">
+            <a:extLst>
+              <a:ext uri="{FF2B5EF4-FFF2-40B4-BE49-F238E27FC236}">
+                <a16:creationId xmlns:a16="http://schemas.microsoft.com/office/drawing/2014/main" id="{E35F6A23-1E14-747B-B941-5E96A99057BF}"/>
+              </a:ext>
+            </a:extLst>
+          </p:cNvPr>
+          <p:cNvSpPr txBox="1"/>
+          <p:nvPr/>
+        </p:nvSpPr>
+        <p:spPr>
+          <a:xfrm>
+            <a:off x="9108733" y="5588525"/>
+            <a:ext cx="1324885" cy="276999"/>
+          </a:xfrm>
+          <a:prstGeom prst="rect">
+            <a:avLst/>
+          </a:prstGeom>
+          <a:noFill/>
+        </p:spPr>
+        <p:txBody>
+          <a:bodyPr wrap="square" rtlCol="0">
+            <a:spAutoFit/>
+          </a:bodyPr>
+          <a:lstStyle/>
+          <a:p>
+            <a:r>
+              <a:rPr lang="en-US" altLang="zh-CN" sz="1200" dirty="0">
+                <a:solidFill>
+                  <a:schemeClr val="bg1"/>
+                </a:solidFill>
+                <a:latin typeface="Comic Sans MS" panose="030F0702030302020204" pitchFamily="66" charset="0"/>
+                <a:ea typeface="MS PGothic" panose="020B0600070205080204" pitchFamily="34" charset="-128"/>
+                <a:cs typeface="Cascadia Code" panose="020B0609020000020004" pitchFamily="49" charset="0"/>
+              </a:rPr>
+              <a:t>F6:ExMenu</a:t>
+            </a:r>
+          </a:p>
+        </p:txBody>
+      </p:sp>
+      <p:sp>
+        <p:nvSpPr>
+          <p:cNvPr id="23" name="文本框 22">
+            <a:extLst>
+              <a:ext uri="{FF2B5EF4-FFF2-40B4-BE49-F238E27FC236}">
+                <a16:creationId xmlns:a16="http://schemas.microsoft.com/office/drawing/2014/main" id="{C6A313F5-C1C7-48F1-4963-DA6D53A84549}"/>
+              </a:ext>
+            </a:extLst>
+          </p:cNvPr>
+          <p:cNvSpPr txBox="1"/>
+          <p:nvPr/>
+        </p:nvSpPr>
+        <p:spPr>
+          <a:xfrm>
+            <a:off x="8028691" y="5363193"/>
+            <a:ext cx="1195753" cy="276999"/>
+          </a:xfrm>
+          <a:prstGeom prst="rect">
+            <a:avLst/>
+          </a:prstGeom>
+          <a:noFill/>
+        </p:spPr>
+        <p:txBody>
+          <a:bodyPr wrap="square" rtlCol="0">
+            <a:spAutoFit/>
+          </a:bodyPr>
+          <a:lstStyle/>
+          <a:p>
+            <a:r>
+              <a:rPr lang="en-US" altLang="zh-CN" sz="1200" dirty="0">
                 <a:solidFill>
                   <a:schemeClr val="bg1"/>
                 </a:solidFill>
@@ -3659,58 +3856,6 @@
                 <a:cs typeface="Cascadia Code" panose="020B0609020000020004" pitchFamily="49" charset="0"/>
               </a:rPr>
               <a:t>F2:Browse</a:t>
-            </a:r>
-          </a:p>
-          <a:p>
-            <a:r>
-              <a:rPr lang="en-US" altLang="zh-CN" sz="1400" dirty="0">
-                <a:solidFill>
-                  <a:schemeClr val="bg1"/>
-                </a:solidFill>
-                <a:latin typeface="Comic Sans MS" panose="030F0702030302020204" pitchFamily="66" charset="0"/>
-                <a:ea typeface="MS PGothic" panose="020B0600070205080204" pitchFamily="34" charset="-128"/>
-                <a:cs typeface="Cascadia Code" panose="020B0609020000020004" pitchFamily="49" charset="0"/>
-              </a:rPr>
-              <a:t>F3:TreeView</a:t>
-            </a:r>
-          </a:p>
-          <a:p>
-            <a:r>
-              <a:rPr lang="en-US" altLang="zh-CN" sz="1400" dirty="0">
-                <a:solidFill>
-                  <a:schemeClr val="bg1"/>
-                </a:solidFill>
-                <a:latin typeface="Comic Sans MS" panose="030F0702030302020204" pitchFamily="66" charset="0"/>
-                <a:ea typeface="MS PGothic" panose="020B0600070205080204" pitchFamily="34" charset="-128"/>
-                <a:cs typeface="Cascadia Code" panose="020B0609020000020004" pitchFamily="49" charset="0"/>
-              </a:rPr>
-              <a:t>F4:Localboot</a:t>
-            </a:r>
-          </a:p>
-          <a:p>
-            <a:r>
-              <a:rPr lang="en-US" altLang="zh-CN" sz="1400" dirty="0">
-                <a:solidFill>
-                  <a:schemeClr val="bg1"/>
-                </a:solidFill>
-                <a:latin typeface="Comic Sans MS" panose="030F0702030302020204" pitchFamily="66" charset="0"/>
-                <a:ea typeface="MS PGothic" panose="020B0600070205080204" pitchFamily="34" charset="-128"/>
-                <a:cs typeface="Cascadia Code" panose="020B0609020000020004" pitchFamily="49" charset="0"/>
-              </a:rPr>
-              <a:t>F5:Tools</a:t>
-            </a:r>
-          </a:p>
-          <a:p>
-            <a:r>
-              <a:rPr lang="en-US" altLang="zh-CN" sz="1400" dirty="0">
-                <a:solidFill>
-                  <a:schemeClr val="bg1"/>
-                </a:solidFill>
-                <a:latin typeface="Comic Sans MS" panose="030F0702030302020204" pitchFamily="66" charset="0"/>
-                <a:ea typeface="MS PGothic" panose="020B0600070205080204" pitchFamily="34" charset="-128"/>
-                <a:cs typeface="Cascadia Code" panose="020B0609020000020004" pitchFamily="49" charset="0"/>
-              </a:rPr>
-              <a:t>F6:ExMenu</a:t>
             </a:r>
           </a:p>
         </p:txBody>

--- a/komeiji_koishi/background.pptx
+++ b/komeiji_koishi/background.pptx
@@ -6,7 +6,11 @@
   </p:sldMasterIdLst>
   <p:sldIdLst>
     <p:sldId id="261" r:id="rId2"/>
-    <p:sldId id="262" r:id="rId3"/>
+    <p:sldId id="266" r:id="rId3"/>
+    <p:sldId id="264" r:id="rId4"/>
+    <p:sldId id="263" r:id="rId5"/>
+    <p:sldId id="265" r:id="rId6"/>
+    <p:sldId id="262" r:id="rId7"/>
   </p:sldIdLst>
   <p:sldSz cx="12192000" cy="6858000"/>
   <p:notesSz cx="6858000" cy="9144000"/>
@@ -3881,6 +3885,2940 @@
         <p:cNvPr id="1" name="">
           <a:extLst>
             <a:ext uri="{FF2B5EF4-FFF2-40B4-BE49-F238E27FC236}">
+              <a16:creationId xmlns:a16="http://schemas.microsoft.com/office/drawing/2014/main" id="{C54ED72E-D114-CA80-8E79-341099506184}"/>
+            </a:ext>
+          </a:extLst>
+        </p:cNvPr>
+        <p:cNvGrpSpPr/>
+        <p:nvPr/>
+      </p:nvGrpSpPr>
+      <p:grpSpPr>
+        <a:xfrm>
+          <a:off x="0" y="0"/>
+          <a:ext cx="0" cy="0"/>
+          <a:chOff x="0" y="0"/>
+          <a:chExt cx="0" cy="0"/>
+        </a:xfrm>
+      </p:grpSpPr>
+      <p:pic>
+        <p:nvPicPr>
+          <p:cNvPr id="7" name="图片 6">
+            <a:extLst>
+              <a:ext uri="{FF2B5EF4-FFF2-40B4-BE49-F238E27FC236}">
+                <a16:creationId xmlns:a16="http://schemas.microsoft.com/office/drawing/2014/main" id="{55B3D271-8170-1ABF-8CC4-C8DF13FBCD4D}"/>
+              </a:ext>
+            </a:extLst>
+          </p:cNvPr>
+          <p:cNvPicPr>
+            <a:picLocks noChangeAspect="1"/>
+          </p:cNvPicPr>
+          <p:nvPr/>
+        </p:nvPicPr>
+        <p:blipFill>
+          <a:blip r:embed="rId2"/>
+          <a:stretch>
+            <a:fillRect/>
+          </a:stretch>
+        </p:blipFill>
+        <p:spPr>
+          <a:xfrm>
+            <a:off x="495950" y="16186"/>
+            <a:ext cx="12163225" cy="6841814"/>
+          </a:xfrm>
+          <a:prstGeom prst="rect">
+            <a:avLst/>
+          </a:prstGeom>
+        </p:spPr>
+      </p:pic>
+      <p:pic>
+        <p:nvPicPr>
+          <p:cNvPr id="9" name="图片 8">
+            <a:extLst>
+              <a:ext uri="{FF2B5EF4-FFF2-40B4-BE49-F238E27FC236}">
+                <a16:creationId xmlns:a16="http://schemas.microsoft.com/office/drawing/2014/main" id="{2D424B84-EF5C-9217-585B-9C958DCC27D5}"/>
+              </a:ext>
+            </a:extLst>
+          </p:cNvPr>
+          <p:cNvPicPr>
+            <a:picLocks noChangeAspect="1"/>
+          </p:cNvPicPr>
+          <p:nvPr/>
+        </p:nvPicPr>
+        <p:blipFill>
+          <a:blip r:embed="rId3">
+            <a:extLst>
+              <a:ext uri="{28A0092B-C50C-407E-A947-70E740481C1C}">
+                <a14:useLocalDpi xmlns:a14="http://schemas.microsoft.com/office/drawing/2010/main" val="0"/>
+              </a:ext>
+            </a:extLst>
+          </a:blip>
+          <a:srcRect r="23033"/>
+          <a:stretch>
+            <a:fillRect/>
+          </a:stretch>
+        </p:blipFill>
+        <p:spPr>
+          <a:xfrm>
+            <a:off x="6694854" y="1028423"/>
+            <a:ext cx="3721347" cy="4834890"/>
+          </a:xfrm>
+          <a:custGeom>
+            <a:avLst/>
+            <a:gdLst>
+              <a:gd name="connsiteX0" fmla="*/ 141895 w 3721347"/>
+              <a:gd name="connsiteY0" fmla="*/ 0 h 4834890"/>
+              <a:gd name="connsiteX1" fmla="*/ 3579452 w 3721347"/>
+              <a:gd name="connsiteY1" fmla="*/ 0 h 4834890"/>
+              <a:gd name="connsiteX2" fmla="*/ 3721347 w 3721347"/>
+              <a:gd name="connsiteY2" fmla="*/ 141895 h 4834890"/>
+              <a:gd name="connsiteX3" fmla="*/ 3721347 w 3721347"/>
+              <a:gd name="connsiteY3" fmla="*/ 4692995 h 4834890"/>
+              <a:gd name="connsiteX4" fmla="*/ 3579452 w 3721347"/>
+              <a:gd name="connsiteY4" fmla="*/ 4834890 h 4834890"/>
+              <a:gd name="connsiteX5" fmla="*/ 141895 w 3721347"/>
+              <a:gd name="connsiteY5" fmla="*/ 4834890 h 4834890"/>
+              <a:gd name="connsiteX6" fmla="*/ 0 w 3721347"/>
+              <a:gd name="connsiteY6" fmla="*/ 4692995 h 4834890"/>
+              <a:gd name="connsiteX7" fmla="*/ 0 w 3721347"/>
+              <a:gd name="connsiteY7" fmla="*/ 141895 h 4834890"/>
+              <a:gd name="connsiteX8" fmla="*/ 141895 w 3721347"/>
+              <a:gd name="connsiteY8" fmla="*/ 0 h 4834890"/>
+            </a:gdLst>
+            <a:ahLst/>
+            <a:cxnLst>
+              <a:cxn ang="0">
+                <a:pos x="connsiteX0" y="connsiteY0"/>
+              </a:cxn>
+              <a:cxn ang="0">
+                <a:pos x="connsiteX1" y="connsiteY1"/>
+              </a:cxn>
+              <a:cxn ang="0">
+                <a:pos x="connsiteX2" y="connsiteY2"/>
+              </a:cxn>
+              <a:cxn ang="0">
+                <a:pos x="connsiteX3" y="connsiteY3"/>
+              </a:cxn>
+              <a:cxn ang="0">
+                <a:pos x="connsiteX4" y="connsiteY4"/>
+              </a:cxn>
+              <a:cxn ang="0">
+                <a:pos x="connsiteX5" y="connsiteY5"/>
+              </a:cxn>
+              <a:cxn ang="0">
+                <a:pos x="connsiteX6" y="connsiteY6"/>
+              </a:cxn>
+              <a:cxn ang="0">
+                <a:pos x="connsiteX7" y="connsiteY7"/>
+              </a:cxn>
+              <a:cxn ang="0">
+                <a:pos x="connsiteX8" y="connsiteY8"/>
+              </a:cxn>
+            </a:cxnLst>
+            <a:rect l="l" t="t" r="r" b="b"/>
+            <a:pathLst>
+              <a:path w="3721347" h="4834890">
+                <a:moveTo>
+                  <a:pt x="141895" y="0"/>
+                </a:moveTo>
+                <a:lnTo>
+                  <a:pt x="3579452" y="0"/>
+                </a:lnTo>
+                <a:cubicBezTo>
+                  <a:pt x="3657818" y="0"/>
+                  <a:pt x="3721347" y="63529"/>
+                  <a:pt x="3721347" y="141895"/>
+                </a:cubicBezTo>
+                <a:lnTo>
+                  <a:pt x="3721347" y="4692995"/>
+                </a:lnTo>
+                <a:cubicBezTo>
+                  <a:pt x="3721347" y="4771361"/>
+                  <a:pt x="3657818" y="4834890"/>
+                  <a:pt x="3579452" y="4834890"/>
+                </a:cubicBezTo>
+                <a:lnTo>
+                  <a:pt x="141895" y="4834890"/>
+                </a:lnTo>
+                <a:cubicBezTo>
+                  <a:pt x="63529" y="4834890"/>
+                  <a:pt x="0" y="4771361"/>
+                  <a:pt x="0" y="4692995"/>
+                </a:cubicBezTo>
+                <a:lnTo>
+                  <a:pt x="0" y="141895"/>
+                </a:lnTo>
+                <a:cubicBezTo>
+                  <a:pt x="0" y="63529"/>
+                  <a:pt x="63529" y="0"/>
+                  <a:pt x="141895" y="0"/>
+                </a:cubicBezTo>
+                <a:close/>
+              </a:path>
+            </a:pathLst>
+          </a:custGeom>
+        </p:spPr>
+      </p:pic>
+      <p:sp>
+        <p:nvSpPr>
+          <p:cNvPr id="15" name="文本框 14">
+            <a:extLst>
+              <a:ext uri="{FF2B5EF4-FFF2-40B4-BE49-F238E27FC236}">
+                <a16:creationId xmlns:a16="http://schemas.microsoft.com/office/drawing/2014/main" id="{EE31495A-F853-0D15-CFC2-6DB1C72CFBFB}"/>
+              </a:ext>
+            </a:extLst>
+          </p:cNvPr>
+          <p:cNvSpPr txBox="1"/>
+          <p:nvPr/>
+        </p:nvSpPr>
+        <p:spPr>
+          <a:xfrm>
+            <a:off x="6381049" y="1104979"/>
+            <a:ext cx="4348955" cy="707886"/>
+          </a:xfrm>
+          <a:prstGeom prst="rect">
+            <a:avLst/>
+          </a:prstGeom>
+          <a:noFill/>
+        </p:spPr>
+        <p:txBody>
+          <a:bodyPr wrap="square" rtlCol="0">
+            <a:spAutoFit/>
+          </a:bodyPr>
+          <a:lstStyle/>
+          <a:p>
+            <a:pPr algn="ctr"/>
+            <a:r>
+              <a:rPr lang="zh-CN" altLang="en-US" sz="1600" dirty="0">
+                <a:solidFill>
+                  <a:schemeClr val="bg1"/>
+                </a:solidFill>
+                <a:latin typeface="华文隶书" panose="02010800040101010101" pitchFamily="2" charset="-122"/>
+                <a:ea typeface="华文隶书" panose="02010800040101010101" pitchFamily="2" charset="-122"/>
+                <a:cs typeface="MV Boli" panose="02000500030200090000" pitchFamily="2" charset="0"/>
+              </a:rPr>
+              <a:t>使用</a:t>
+            </a:r>
+            <a:r>
+              <a:rPr lang="zh-CN" altLang="en-US" sz="2000" b="1" dirty="0">
+                <a:solidFill>
+                  <a:schemeClr val="bg1"/>
+                </a:solidFill>
+                <a:latin typeface="华文隶书" panose="02010800040101010101" pitchFamily="2" charset="-122"/>
+                <a:ea typeface="华文隶书" panose="02010800040101010101" pitchFamily="2" charset="-122"/>
+                <a:cs typeface="MV Boli" panose="02000500030200090000" pitchFamily="2" charset="0"/>
+              </a:rPr>
+              <a:t>方向键</a:t>
+            </a:r>
+            <a:r>
+              <a:rPr lang="zh-CN" altLang="en-US" sz="1600" dirty="0">
+                <a:solidFill>
+                  <a:schemeClr val="bg1"/>
+                </a:solidFill>
+                <a:latin typeface="华文隶书" panose="02010800040101010101" pitchFamily="2" charset="-122"/>
+                <a:ea typeface="华文隶书" panose="02010800040101010101" pitchFamily="2" charset="-122"/>
+                <a:cs typeface="MV Boli" panose="02000500030200090000" pitchFamily="2" charset="0"/>
+              </a:rPr>
+              <a:t>选择</a:t>
+            </a:r>
+            <a:endParaRPr lang="en-US" altLang="zh-CN" sz="1600" dirty="0">
+              <a:solidFill>
+                <a:schemeClr val="bg1"/>
+              </a:solidFill>
+              <a:latin typeface="华文隶书" panose="02010800040101010101" pitchFamily="2" charset="-122"/>
+              <a:ea typeface="华文隶书" panose="02010800040101010101" pitchFamily="2" charset="-122"/>
+              <a:cs typeface="MV Boli" panose="02000500030200090000" pitchFamily="2" charset="0"/>
+            </a:endParaRPr>
+          </a:p>
+          <a:p>
+            <a:pPr algn="ctr"/>
+            <a:r>
+              <a:rPr lang="zh-CN" altLang="en-US" sz="1600" dirty="0">
+                <a:solidFill>
+                  <a:schemeClr val="bg1"/>
+                </a:solidFill>
+                <a:latin typeface="华文隶书" panose="02010800040101010101" pitchFamily="2" charset="-122"/>
+                <a:ea typeface="华文隶书" panose="02010800040101010101" pitchFamily="2" charset="-122"/>
+                <a:cs typeface="MV Boli" panose="02000500030200090000" pitchFamily="2" charset="0"/>
+              </a:rPr>
+              <a:t>按</a:t>
+            </a:r>
+            <a:r>
+              <a:rPr lang="zh-CN" altLang="en-US" sz="2000" b="1" dirty="0">
+                <a:solidFill>
+                  <a:schemeClr val="bg1"/>
+                </a:solidFill>
+                <a:latin typeface="华文隶书" panose="02010800040101010101" pitchFamily="2" charset="-122"/>
+                <a:ea typeface="华文隶书" panose="02010800040101010101" pitchFamily="2" charset="-122"/>
+                <a:cs typeface="MV Boli" panose="02000500030200090000" pitchFamily="2" charset="0"/>
+              </a:rPr>
+              <a:t>回车键</a:t>
+            </a:r>
+            <a:r>
+              <a:rPr lang="zh-CN" altLang="en-US" sz="1600" dirty="0">
+                <a:solidFill>
+                  <a:schemeClr val="bg1"/>
+                </a:solidFill>
+                <a:latin typeface="华文隶书" panose="02010800040101010101" pitchFamily="2" charset="-122"/>
+                <a:ea typeface="华文隶书" panose="02010800040101010101" pitchFamily="2" charset="-122"/>
+                <a:cs typeface="MV Boli" panose="02000500030200090000" pitchFamily="2" charset="0"/>
+              </a:rPr>
+              <a:t>确认</a:t>
+            </a:r>
+            <a:endParaRPr lang="en-US" altLang="zh-CN" sz="1600" dirty="0">
+              <a:solidFill>
+                <a:schemeClr val="bg1"/>
+              </a:solidFill>
+              <a:latin typeface="华文隶书" panose="02010800040101010101" pitchFamily="2" charset="-122"/>
+              <a:ea typeface="华文隶书" panose="02010800040101010101" pitchFamily="2" charset="-122"/>
+              <a:cs typeface="MV Boli" panose="02000500030200090000" pitchFamily="2" charset="0"/>
+            </a:endParaRPr>
+          </a:p>
+        </p:txBody>
+      </p:sp>
+      <p:sp>
+        <p:nvSpPr>
+          <p:cNvPr id="5" name="文本框 4">
+            <a:extLst>
+              <a:ext uri="{FF2B5EF4-FFF2-40B4-BE49-F238E27FC236}">
+                <a16:creationId xmlns:a16="http://schemas.microsoft.com/office/drawing/2014/main" id="{4DDFB007-B1E7-9743-2CB3-ADF635117534}"/>
+              </a:ext>
+            </a:extLst>
+          </p:cNvPr>
+          <p:cNvSpPr txBox="1"/>
+          <p:nvPr/>
+        </p:nvSpPr>
+        <p:spPr>
+          <a:xfrm>
+            <a:off x="7184592" y="5261020"/>
+            <a:ext cx="948431" cy="276999"/>
+          </a:xfrm>
+          <a:prstGeom prst="rect">
+            <a:avLst/>
+          </a:prstGeom>
+          <a:noFill/>
+        </p:spPr>
+        <p:txBody>
+          <a:bodyPr wrap="square" rtlCol="0">
+            <a:spAutoFit/>
+          </a:bodyPr>
+          <a:lstStyle/>
+          <a:p>
+            <a:r>
+              <a:rPr lang="zh-CN" altLang="en-US" sz="1200" dirty="0">
+                <a:solidFill>
+                  <a:schemeClr val="bg1"/>
+                </a:solidFill>
+                <a:latin typeface="华文隶书" panose="02010800040101010101" pitchFamily="2" charset="-122"/>
+                <a:ea typeface="华文隶书" panose="02010800040101010101" pitchFamily="2" charset="-122"/>
+                <a:cs typeface="Cascadia Code" panose="020B0609020000020004" pitchFamily="49" charset="0"/>
+              </a:rPr>
+              <a:t>帮助</a:t>
+            </a:r>
+            <a:endParaRPr lang="en-US" altLang="zh-CN" sz="1200" dirty="0">
+              <a:solidFill>
+                <a:schemeClr val="bg1"/>
+              </a:solidFill>
+              <a:latin typeface="华文隶书" panose="02010800040101010101" pitchFamily="2" charset="-122"/>
+              <a:ea typeface="华文隶书" panose="02010800040101010101" pitchFamily="2" charset="-122"/>
+              <a:cs typeface="Cascadia Code" panose="020B0609020000020004" pitchFamily="49" charset="0"/>
+            </a:endParaRPr>
+          </a:p>
+        </p:txBody>
+      </p:sp>
+      <p:sp>
+        <p:nvSpPr>
+          <p:cNvPr id="13" name="文本框 12">
+            <a:extLst>
+              <a:ext uri="{FF2B5EF4-FFF2-40B4-BE49-F238E27FC236}">
+                <a16:creationId xmlns:a16="http://schemas.microsoft.com/office/drawing/2014/main" id="{91883BCB-845E-F6C6-CAC3-390910F6B877}"/>
+              </a:ext>
+            </a:extLst>
+          </p:cNvPr>
+          <p:cNvSpPr txBox="1"/>
+          <p:nvPr/>
+        </p:nvSpPr>
+        <p:spPr>
+          <a:xfrm>
+            <a:off x="7179010" y="5553274"/>
+            <a:ext cx="1478595" cy="276999"/>
+          </a:xfrm>
+          <a:prstGeom prst="rect">
+            <a:avLst/>
+          </a:prstGeom>
+          <a:noFill/>
+        </p:spPr>
+        <p:txBody>
+          <a:bodyPr wrap="square" rtlCol="0">
+            <a:spAutoFit/>
+          </a:bodyPr>
+          <a:lstStyle/>
+          <a:p>
+            <a:r>
+              <a:rPr lang="zh-CN" altLang="en-US" sz="1200" dirty="0">
+                <a:solidFill>
+                  <a:schemeClr val="bg1"/>
+                </a:solidFill>
+                <a:latin typeface="华文隶书" panose="02010800040101010101" pitchFamily="2" charset="-122"/>
+                <a:ea typeface="华文隶书" panose="02010800040101010101" pitchFamily="2" charset="-122"/>
+                <a:cs typeface="Cascadia Code" panose="020B0609020000020004" pitchFamily="49" charset="0"/>
+              </a:rPr>
+              <a:t>本地启动</a:t>
+            </a:r>
+            <a:endParaRPr lang="en-US" altLang="zh-CN" sz="1200" dirty="0">
+              <a:solidFill>
+                <a:schemeClr val="bg1"/>
+              </a:solidFill>
+              <a:latin typeface="华文隶书" panose="02010800040101010101" pitchFamily="2" charset="-122"/>
+              <a:ea typeface="华文隶书" panose="02010800040101010101" pitchFamily="2" charset="-122"/>
+              <a:cs typeface="Cascadia Code" panose="020B0609020000020004" pitchFamily="49" charset="0"/>
+            </a:endParaRPr>
+          </a:p>
+        </p:txBody>
+      </p:sp>
+      <p:sp>
+        <p:nvSpPr>
+          <p:cNvPr id="16" name="文本框 15">
+            <a:extLst>
+              <a:ext uri="{FF2B5EF4-FFF2-40B4-BE49-F238E27FC236}">
+                <a16:creationId xmlns:a16="http://schemas.microsoft.com/office/drawing/2014/main" id="{F4B58872-1561-88B0-8AEC-88BA8CB9C0E1}"/>
+              </a:ext>
+            </a:extLst>
+          </p:cNvPr>
+          <p:cNvSpPr txBox="1"/>
+          <p:nvPr/>
+        </p:nvSpPr>
+        <p:spPr>
+          <a:xfrm>
+            <a:off x="8404970" y="5553274"/>
+            <a:ext cx="948431" cy="276999"/>
+          </a:xfrm>
+          <a:prstGeom prst="rect">
+            <a:avLst/>
+          </a:prstGeom>
+          <a:noFill/>
+        </p:spPr>
+        <p:txBody>
+          <a:bodyPr wrap="square" rtlCol="0">
+            <a:spAutoFit/>
+          </a:bodyPr>
+          <a:lstStyle/>
+          <a:p>
+            <a:r>
+              <a:rPr lang="zh-CN" altLang="en-US" sz="1200" dirty="0">
+                <a:solidFill>
+                  <a:schemeClr val="bg1"/>
+                </a:solidFill>
+                <a:latin typeface="华文隶书" panose="02010800040101010101" pitchFamily="2" charset="-122"/>
+                <a:ea typeface="华文隶书" panose="02010800040101010101" pitchFamily="2" charset="-122"/>
+                <a:cs typeface="Cascadia Code" panose="020B0609020000020004" pitchFamily="49" charset="0"/>
+              </a:rPr>
+              <a:t>工具</a:t>
+            </a:r>
+            <a:endParaRPr lang="en-US" altLang="zh-CN" sz="1200" dirty="0">
+              <a:solidFill>
+                <a:schemeClr val="bg1"/>
+              </a:solidFill>
+              <a:latin typeface="华文隶书" panose="02010800040101010101" pitchFamily="2" charset="-122"/>
+              <a:ea typeface="华文隶书" panose="02010800040101010101" pitchFamily="2" charset="-122"/>
+              <a:cs typeface="Cascadia Code" panose="020B0609020000020004" pitchFamily="49" charset="0"/>
+            </a:endParaRPr>
+          </a:p>
+        </p:txBody>
+      </p:sp>
+      <p:sp>
+        <p:nvSpPr>
+          <p:cNvPr id="19" name="文本框 18">
+            <a:extLst>
+              <a:ext uri="{FF2B5EF4-FFF2-40B4-BE49-F238E27FC236}">
+                <a16:creationId xmlns:a16="http://schemas.microsoft.com/office/drawing/2014/main" id="{6BF944C9-D820-CBE8-B63B-BD5808BE383E}"/>
+              </a:ext>
+            </a:extLst>
+          </p:cNvPr>
+          <p:cNvSpPr txBox="1"/>
+          <p:nvPr/>
+        </p:nvSpPr>
+        <p:spPr>
+          <a:xfrm>
+            <a:off x="9494076" y="5261020"/>
+            <a:ext cx="1374810" cy="276999"/>
+          </a:xfrm>
+          <a:prstGeom prst="rect">
+            <a:avLst/>
+          </a:prstGeom>
+          <a:noFill/>
+        </p:spPr>
+        <p:txBody>
+          <a:bodyPr wrap="square" rtlCol="0">
+            <a:spAutoFit/>
+          </a:bodyPr>
+          <a:lstStyle/>
+          <a:p>
+            <a:r>
+              <a:rPr lang="zh-CN" altLang="en-US" sz="1200" dirty="0">
+                <a:solidFill>
+                  <a:schemeClr val="bg1"/>
+                </a:solidFill>
+                <a:latin typeface="华文隶书" panose="02010800040101010101" pitchFamily="2" charset="-122"/>
+                <a:ea typeface="华文隶书" panose="02010800040101010101" pitchFamily="2" charset="-122"/>
+                <a:cs typeface="Cascadia Code" panose="020B0609020000020004" pitchFamily="49" charset="0"/>
+              </a:rPr>
+              <a:t>树状图</a:t>
+            </a:r>
+            <a:endParaRPr lang="en-US" altLang="zh-CN" sz="1200" dirty="0">
+              <a:solidFill>
+                <a:schemeClr val="bg1"/>
+              </a:solidFill>
+              <a:latin typeface="华文隶书" panose="02010800040101010101" pitchFamily="2" charset="-122"/>
+              <a:ea typeface="华文隶书" panose="02010800040101010101" pitchFamily="2" charset="-122"/>
+              <a:cs typeface="Cascadia Code" panose="020B0609020000020004" pitchFamily="49" charset="0"/>
+            </a:endParaRPr>
+          </a:p>
+        </p:txBody>
+      </p:sp>
+      <p:sp>
+        <p:nvSpPr>
+          <p:cNvPr id="21" name="文本框 20">
+            <a:extLst>
+              <a:ext uri="{FF2B5EF4-FFF2-40B4-BE49-F238E27FC236}">
+                <a16:creationId xmlns:a16="http://schemas.microsoft.com/office/drawing/2014/main" id="{189DC8A2-C3E9-248F-622D-655D57024525}"/>
+              </a:ext>
+            </a:extLst>
+          </p:cNvPr>
+          <p:cNvSpPr txBox="1"/>
+          <p:nvPr/>
+        </p:nvSpPr>
+        <p:spPr>
+          <a:xfrm>
+            <a:off x="9492507" y="5553274"/>
+            <a:ext cx="1324885" cy="276999"/>
+          </a:xfrm>
+          <a:prstGeom prst="rect">
+            <a:avLst/>
+          </a:prstGeom>
+          <a:noFill/>
+        </p:spPr>
+        <p:txBody>
+          <a:bodyPr wrap="square" rtlCol="0">
+            <a:spAutoFit/>
+          </a:bodyPr>
+          <a:lstStyle/>
+          <a:p>
+            <a:r>
+              <a:rPr lang="zh-CN" altLang="en-US" sz="1200" dirty="0">
+                <a:solidFill>
+                  <a:schemeClr val="bg1"/>
+                </a:solidFill>
+                <a:latin typeface="华文隶书" panose="02010800040101010101" pitchFamily="2" charset="-122"/>
+                <a:ea typeface="华文隶书" panose="02010800040101010101" pitchFamily="2" charset="-122"/>
+                <a:cs typeface="Cascadia Code" panose="020B0609020000020004" pitchFamily="49" charset="0"/>
+              </a:rPr>
+              <a:t>扩展菜单</a:t>
+            </a:r>
+            <a:endParaRPr lang="en-US" altLang="zh-CN" sz="1200" dirty="0">
+              <a:solidFill>
+                <a:schemeClr val="bg1"/>
+              </a:solidFill>
+              <a:latin typeface="华文隶书" panose="02010800040101010101" pitchFamily="2" charset="-122"/>
+              <a:ea typeface="华文隶书" panose="02010800040101010101" pitchFamily="2" charset="-122"/>
+              <a:cs typeface="Cascadia Code" panose="020B0609020000020004" pitchFamily="49" charset="0"/>
+            </a:endParaRPr>
+          </a:p>
+        </p:txBody>
+      </p:sp>
+      <p:sp>
+        <p:nvSpPr>
+          <p:cNvPr id="23" name="文本框 22">
+            <a:extLst>
+              <a:ext uri="{FF2B5EF4-FFF2-40B4-BE49-F238E27FC236}">
+                <a16:creationId xmlns:a16="http://schemas.microsoft.com/office/drawing/2014/main" id="{D91F30E0-D467-87DB-DC55-2A4A7D576BE2}"/>
+              </a:ext>
+            </a:extLst>
+          </p:cNvPr>
+          <p:cNvSpPr txBox="1"/>
+          <p:nvPr/>
+        </p:nvSpPr>
+        <p:spPr>
+          <a:xfrm>
+            <a:off x="8412465" y="5261020"/>
+            <a:ext cx="1195753" cy="276999"/>
+          </a:xfrm>
+          <a:prstGeom prst="rect">
+            <a:avLst/>
+          </a:prstGeom>
+          <a:noFill/>
+        </p:spPr>
+        <p:txBody>
+          <a:bodyPr wrap="square" rtlCol="0">
+            <a:spAutoFit/>
+          </a:bodyPr>
+          <a:lstStyle/>
+          <a:p>
+            <a:r>
+              <a:rPr lang="zh-CN" altLang="en-US" sz="1200" dirty="0">
+                <a:solidFill>
+                  <a:schemeClr val="bg1"/>
+                </a:solidFill>
+                <a:latin typeface="华文隶书" panose="02010800040101010101" pitchFamily="2" charset="-122"/>
+                <a:ea typeface="华文隶书" panose="02010800040101010101" pitchFamily="2" charset="-122"/>
+                <a:cs typeface="Cascadia Code" panose="020B0609020000020004" pitchFamily="49" charset="0"/>
+              </a:rPr>
+              <a:t>浏览</a:t>
+            </a:r>
+            <a:endParaRPr lang="en-US" altLang="zh-CN" sz="1200" dirty="0">
+              <a:solidFill>
+                <a:schemeClr val="bg1"/>
+              </a:solidFill>
+              <a:latin typeface="华文隶书" panose="02010800040101010101" pitchFamily="2" charset="-122"/>
+              <a:ea typeface="华文隶书" panose="02010800040101010101" pitchFamily="2" charset="-122"/>
+              <a:cs typeface="Cascadia Code" panose="020B0609020000020004" pitchFamily="49" charset="0"/>
+            </a:endParaRPr>
+          </a:p>
+        </p:txBody>
+      </p:sp>
+      <p:grpSp>
+        <p:nvGrpSpPr>
+          <p:cNvPr id="4" name="组合 3">
+            <a:extLst>
+              <a:ext uri="{FF2B5EF4-FFF2-40B4-BE49-F238E27FC236}">
+                <a16:creationId xmlns:a16="http://schemas.microsoft.com/office/drawing/2014/main" id="{1F1E5B00-5E51-A1D1-AEB2-F58D7E1F6D72}"/>
+              </a:ext>
+            </a:extLst>
+          </p:cNvPr>
+          <p:cNvGrpSpPr/>
+          <p:nvPr/>
+        </p:nvGrpSpPr>
+        <p:grpSpPr>
+          <a:xfrm>
+            <a:off x="6844092" y="5261020"/>
+            <a:ext cx="363499" cy="276999"/>
+            <a:chOff x="7046956" y="3795146"/>
+            <a:chExt cx="363499" cy="276999"/>
+          </a:xfrm>
+        </p:grpSpPr>
+        <p:sp>
+          <p:nvSpPr>
+            <p:cNvPr id="2" name="矩形: 圆角 1">
+              <a:extLst>
+                <a:ext uri="{FF2B5EF4-FFF2-40B4-BE49-F238E27FC236}">
+                  <a16:creationId xmlns:a16="http://schemas.microsoft.com/office/drawing/2014/main" id="{81740EBB-9C6A-2CAC-4284-FB2613ED129D}"/>
+                </a:ext>
+              </a:extLst>
+            </p:cNvPr>
+            <p:cNvSpPr>
+              <a:spLocks noChangeAspect="1"/>
+            </p:cNvSpPr>
+            <p:nvPr/>
+          </p:nvSpPr>
+          <p:spPr>
+            <a:xfrm>
+              <a:off x="7104502" y="3809699"/>
+              <a:ext cx="236602" cy="237534"/>
+            </a:xfrm>
+            <a:prstGeom prst="roundRect">
+              <a:avLst/>
+            </a:prstGeom>
+            <a:solidFill>
+              <a:schemeClr val="bg1"/>
+            </a:solidFill>
+            <a:ln>
+              <a:noFill/>
+            </a:ln>
+          </p:spPr>
+          <p:style>
+            <a:lnRef idx="2">
+              <a:schemeClr val="accent1">
+                <a:shade val="15000"/>
+              </a:schemeClr>
+            </a:lnRef>
+            <a:fillRef idx="1">
+              <a:schemeClr val="accent1"/>
+            </a:fillRef>
+            <a:effectRef idx="0">
+              <a:schemeClr val="accent1"/>
+            </a:effectRef>
+            <a:fontRef idx="minor">
+              <a:schemeClr val="lt1"/>
+            </a:fontRef>
+          </p:style>
+          <p:txBody>
+            <a:bodyPr rtlCol="0" anchor="ctr"/>
+            <a:lstStyle/>
+            <a:p>
+              <a:pPr algn="ctr"/>
+              <a:endParaRPr lang="zh-CN" altLang="en-US"/>
+            </a:p>
+          </p:txBody>
+        </p:sp>
+        <p:sp>
+          <p:nvSpPr>
+            <p:cNvPr id="3" name="文本框 2">
+              <a:extLst>
+                <a:ext uri="{FF2B5EF4-FFF2-40B4-BE49-F238E27FC236}">
+                  <a16:creationId xmlns:a16="http://schemas.microsoft.com/office/drawing/2014/main" id="{C10B8E61-FD1B-68C0-AAEF-411660356E3B}"/>
+                </a:ext>
+              </a:extLst>
+            </p:cNvPr>
+            <p:cNvSpPr txBox="1"/>
+            <p:nvPr/>
+          </p:nvSpPr>
+          <p:spPr>
+            <a:xfrm>
+              <a:off x="7046956" y="3795146"/>
+              <a:ext cx="363499" cy="276999"/>
+            </a:xfrm>
+            <a:prstGeom prst="rect">
+              <a:avLst/>
+            </a:prstGeom>
+            <a:noFill/>
+          </p:spPr>
+          <p:txBody>
+            <a:bodyPr wrap="square" rtlCol="0">
+              <a:spAutoFit/>
+            </a:bodyPr>
+            <a:lstStyle/>
+            <a:p>
+              <a:r>
+                <a:rPr lang="en-US" altLang="zh-CN" sz="1200" dirty="0">
+                  <a:latin typeface="Comic Sans MS" panose="030F0702030302020204" pitchFamily="66" charset="0"/>
+                </a:rPr>
+                <a:t>F1</a:t>
+              </a:r>
+              <a:endParaRPr lang="zh-CN" altLang="en-US" sz="1200" dirty="0">
+                <a:latin typeface="Comic Sans MS" panose="030F0702030302020204" pitchFamily="66" charset="0"/>
+              </a:endParaRPr>
+            </a:p>
+          </p:txBody>
+        </p:sp>
+      </p:grpSp>
+      <p:grpSp>
+        <p:nvGrpSpPr>
+          <p:cNvPr id="6" name="组合 5">
+            <a:extLst>
+              <a:ext uri="{FF2B5EF4-FFF2-40B4-BE49-F238E27FC236}">
+                <a16:creationId xmlns:a16="http://schemas.microsoft.com/office/drawing/2014/main" id="{906C3349-2EA3-B8A9-EA8C-19A5B9C70DFA}"/>
+              </a:ext>
+            </a:extLst>
+          </p:cNvPr>
+          <p:cNvGrpSpPr/>
+          <p:nvPr/>
+        </p:nvGrpSpPr>
+        <p:grpSpPr>
+          <a:xfrm>
+            <a:off x="8110853" y="5261020"/>
+            <a:ext cx="384638" cy="276999"/>
+            <a:chOff x="7046956" y="3795146"/>
+            <a:chExt cx="384638" cy="276999"/>
+          </a:xfrm>
+        </p:grpSpPr>
+        <p:sp>
+          <p:nvSpPr>
+            <p:cNvPr id="8" name="矩形: 圆角 7">
+              <a:extLst>
+                <a:ext uri="{FF2B5EF4-FFF2-40B4-BE49-F238E27FC236}">
+                  <a16:creationId xmlns:a16="http://schemas.microsoft.com/office/drawing/2014/main" id="{44EA6421-40B4-0254-3A97-22CCF577C895}"/>
+                </a:ext>
+              </a:extLst>
+            </p:cNvPr>
+            <p:cNvSpPr>
+              <a:spLocks noChangeAspect="1"/>
+            </p:cNvSpPr>
+            <p:nvPr/>
+          </p:nvSpPr>
+          <p:spPr>
+            <a:xfrm>
+              <a:off x="7104502" y="3809699"/>
+              <a:ext cx="236602" cy="237534"/>
+            </a:xfrm>
+            <a:prstGeom prst="roundRect">
+              <a:avLst/>
+            </a:prstGeom>
+            <a:solidFill>
+              <a:schemeClr val="bg1"/>
+            </a:solidFill>
+            <a:ln>
+              <a:noFill/>
+            </a:ln>
+          </p:spPr>
+          <p:style>
+            <a:lnRef idx="2">
+              <a:schemeClr val="accent1">
+                <a:shade val="15000"/>
+              </a:schemeClr>
+            </a:lnRef>
+            <a:fillRef idx="1">
+              <a:schemeClr val="accent1"/>
+            </a:fillRef>
+            <a:effectRef idx="0">
+              <a:schemeClr val="accent1"/>
+            </a:effectRef>
+            <a:fontRef idx="minor">
+              <a:schemeClr val="lt1"/>
+            </a:fontRef>
+          </p:style>
+          <p:txBody>
+            <a:bodyPr rtlCol="0" anchor="ctr"/>
+            <a:lstStyle/>
+            <a:p>
+              <a:pPr algn="ctr"/>
+              <a:endParaRPr lang="zh-CN" altLang="en-US"/>
+            </a:p>
+          </p:txBody>
+        </p:sp>
+        <p:sp>
+          <p:nvSpPr>
+            <p:cNvPr id="10" name="文本框 9">
+              <a:extLst>
+                <a:ext uri="{FF2B5EF4-FFF2-40B4-BE49-F238E27FC236}">
+                  <a16:creationId xmlns:a16="http://schemas.microsoft.com/office/drawing/2014/main" id="{0B835D90-53A9-73A8-C176-608F8164BCB0}"/>
+                </a:ext>
+              </a:extLst>
+            </p:cNvPr>
+            <p:cNvSpPr txBox="1"/>
+            <p:nvPr/>
+          </p:nvSpPr>
+          <p:spPr>
+            <a:xfrm>
+              <a:off x="7046956" y="3795146"/>
+              <a:ext cx="384638" cy="276999"/>
+            </a:xfrm>
+            <a:prstGeom prst="rect">
+              <a:avLst/>
+            </a:prstGeom>
+            <a:noFill/>
+          </p:spPr>
+          <p:txBody>
+            <a:bodyPr wrap="square" rtlCol="0">
+              <a:spAutoFit/>
+            </a:bodyPr>
+            <a:lstStyle/>
+            <a:p>
+              <a:r>
+                <a:rPr lang="en-US" altLang="zh-CN" sz="1200" dirty="0">
+                  <a:latin typeface="Comic Sans MS" panose="030F0702030302020204" pitchFamily="66" charset="0"/>
+                </a:rPr>
+                <a:t>F2</a:t>
+              </a:r>
+              <a:endParaRPr lang="zh-CN" altLang="en-US" sz="1200" dirty="0">
+                <a:latin typeface="Comic Sans MS" panose="030F0702030302020204" pitchFamily="66" charset="0"/>
+              </a:endParaRPr>
+            </a:p>
+          </p:txBody>
+        </p:sp>
+      </p:grpSp>
+      <p:grpSp>
+        <p:nvGrpSpPr>
+          <p:cNvPr id="11" name="组合 10">
+            <a:extLst>
+              <a:ext uri="{FF2B5EF4-FFF2-40B4-BE49-F238E27FC236}">
+                <a16:creationId xmlns:a16="http://schemas.microsoft.com/office/drawing/2014/main" id="{35171CF6-7B66-FAB3-9895-EB7BB3FF53E4}"/>
+              </a:ext>
+            </a:extLst>
+          </p:cNvPr>
+          <p:cNvGrpSpPr/>
+          <p:nvPr/>
+        </p:nvGrpSpPr>
+        <p:grpSpPr>
+          <a:xfrm>
+            <a:off x="9175346" y="5261020"/>
+            <a:ext cx="429386" cy="276999"/>
+            <a:chOff x="7046956" y="3795146"/>
+            <a:chExt cx="429386" cy="276999"/>
+          </a:xfrm>
+        </p:grpSpPr>
+        <p:sp>
+          <p:nvSpPr>
+            <p:cNvPr id="12" name="矩形: 圆角 11">
+              <a:extLst>
+                <a:ext uri="{FF2B5EF4-FFF2-40B4-BE49-F238E27FC236}">
+                  <a16:creationId xmlns:a16="http://schemas.microsoft.com/office/drawing/2014/main" id="{3091364A-AABE-33E0-694B-C3FAC91BA3FA}"/>
+                </a:ext>
+              </a:extLst>
+            </p:cNvPr>
+            <p:cNvSpPr>
+              <a:spLocks noChangeAspect="1"/>
+            </p:cNvSpPr>
+            <p:nvPr/>
+          </p:nvSpPr>
+          <p:spPr>
+            <a:xfrm>
+              <a:off x="7104502" y="3809699"/>
+              <a:ext cx="236602" cy="237534"/>
+            </a:xfrm>
+            <a:prstGeom prst="roundRect">
+              <a:avLst/>
+            </a:prstGeom>
+            <a:solidFill>
+              <a:schemeClr val="bg1"/>
+            </a:solidFill>
+            <a:ln>
+              <a:noFill/>
+            </a:ln>
+          </p:spPr>
+          <p:style>
+            <a:lnRef idx="2">
+              <a:schemeClr val="accent1">
+                <a:shade val="15000"/>
+              </a:schemeClr>
+            </a:lnRef>
+            <a:fillRef idx="1">
+              <a:schemeClr val="accent1"/>
+            </a:fillRef>
+            <a:effectRef idx="0">
+              <a:schemeClr val="accent1"/>
+            </a:effectRef>
+            <a:fontRef idx="minor">
+              <a:schemeClr val="lt1"/>
+            </a:fontRef>
+          </p:style>
+          <p:txBody>
+            <a:bodyPr rtlCol="0" anchor="ctr"/>
+            <a:lstStyle/>
+            <a:p>
+              <a:pPr algn="ctr"/>
+              <a:endParaRPr lang="zh-CN" altLang="en-US"/>
+            </a:p>
+          </p:txBody>
+        </p:sp>
+        <p:sp>
+          <p:nvSpPr>
+            <p:cNvPr id="14" name="文本框 13">
+              <a:extLst>
+                <a:ext uri="{FF2B5EF4-FFF2-40B4-BE49-F238E27FC236}">
+                  <a16:creationId xmlns:a16="http://schemas.microsoft.com/office/drawing/2014/main" id="{5F25DEC4-FB21-C1F4-1331-EB471B1F238B}"/>
+                </a:ext>
+              </a:extLst>
+            </p:cNvPr>
+            <p:cNvSpPr txBox="1"/>
+            <p:nvPr/>
+          </p:nvSpPr>
+          <p:spPr>
+            <a:xfrm>
+              <a:off x="7046956" y="3795146"/>
+              <a:ext cx="429386" cy="276999"/>
+            </a:xfrm>
+            <a:prstGeom prst="rect">
+              <a:avLst/>
+            </a:prstGeom>
+            <a:noFill/>
+          </p:spPr>
+          <p:txBody>
+            <a:bodyPr wrap="square" rtlCol="0">
+              <a:spAutoFit/>
+            </a:bodyPr>
+            <a:lstStyle/>
+            <a:p>
+              <a:r>
+                <a:rPr lang="en-US" altLang="zh-CN" sz="1200" dirty="0">
+                  <a:latin typeface="Comic Sans MS" panose="030F0702030302020204" pitchFamily="66" charset="0"/>
+                </a:rPr>
+                <a:t>F3</a:t>
+              </a:r>
+              <a:endParaRPr lang="zh-CN" altLang="en-US" sz="1200" dirty="0">
+                <a:latin typeface="Comic Sans MS" panose="030F0702030302020204" pitchFamily="66" charset="0"/>
+              </a:endParaRPr>
+            </a:p>
+          </p:txBody>
+        </p:sp>
+      </p:grpSp>
+      <p:grpSp>
+        <p:nvGrpSpPr>
+          <p:cNvPr id="17" name="组合 16">
+            <a:extLst>
+              <a:ext uri="{FF2B5EF4-FFF2-40B4-BE49-F238E27FC236}">
+                <a16:creationId xmlns:a16="http://schemas.microsoft.com/office/drawing/2014/main" id="{AEACAD4E-2B68-1D78-6ABC-671FDD22A4DD}"/>
+              </a:ext>
+            </a:extLst>
+          </p:cNvPr>
+          <p:cNvGrpSpPr/>
+          <p:nvPr/>
+        </p:nvGrpSpPr>
+        <p:grpSpPr>
+          <a:xfrm>
+            <a:off x="9175345" y="5553274"/>
+            <a:ext cx="429386" cy="276999"/>
+            <a:chOff x="7046956" y="3795146"/>
+            <a:chExt cx="429386" cy="276999"/>
+          </a:xfrm>
+        </p:grpSpPr>
+        <p:sp>
+          <p:nvSpPr>
+            <p:cNvPr id="18" name="矩形: 圆角 17">
+              <a:extLst>
+                <a:ext uri="{FF2B5EF4-FFF2-40B4-BE49-F238E27FC236}">
+                  <a16:creationId xmlns:a16="http://schemas.microsoft.com/office/drawing/2014/main" id="{5399139D-2972-77D2-C48A-B58EE596C678}"/>
+                </a:ext>
+              </a:extLst>
+            </p:cNvPr>
+            <p:cNvSpPr>
+              <a:spLocks noChangeAspect="1"/>
+            </p:cNvSpPr>
+            <p:nvPr/>
+          </p:nvSpPr>
+          <p:spPr>
+            <a:xfrm>
+              <a:off x="7104502" y="3809699"/>
+              <a:ext cx="236602" cy="237534"/>
+            </a:xfrm>
+            <a:prstGeom prst="roundRect">
+              <a:avLst/>
+            </a:prstGeom>
+            <a:solidFill>
+              <a:schemeClr val="bg1"/>
+            </a:solidFill>
+            <a:ln>
+              <a:noFill/>
+            </a:ln>
+          </p:spPr>
+          <p:style>
+            <a:lnRef idx="2">
+              <a:schemeClr val="accent1">
+                <a:shade val="15000"/>
+              </a:schemeClr>
+            </a:lnRef>
+            <a:fillRef idx="1">
+              <a:schemeClr val="accent1"/>
+            </a:fillRef>
+            <a:effectRef idx="0">
+              <a:schemeClr val="accent1"/>
+            </a:effectRef>
+            <a:fontRef idx="minor">
+              <a:schemeClr val="lt1"/>
+            </a:fontRef>
+          </p:style>
+          <p:txBody>
+            <a:bodyPr rtlCol="0" anchor="ctr"/>
+            <a:lstStyle/>
+            <a:p>
+              <a:pPr algn="ctr"/>
+              <a:endParaRPr lang="zh-CN" altLang="en-US"/>
+            </a:p>
+          </p:txBody>
+        </p:sp>
+        <p:sp>
+          <p:nvSpPr>
+            <p:cNvPr id="20" name="文本框 19">
+              <a:extLst>
+                <a:ext uri="{FF2B5EF4-FFF2-40B4-BE49-F238E27FC236}">
+                  <a16:creationId xmlns:a16="http://schemas.microsoft.com/office/drawing/2014/main" id="{55D2C529-AC29-6CED-E203-C1F2DD6C4F07}"/>
+                </a:ext>
+              </a:extLst>
+            </p:cNvPr>
+            <p:cNvSpPr txBox="1"/>
+            <p:nvPr/>
+          </p:nvSpPr>
+          <p:spPr>
+            <a:xfrm>
+              <a:off x="7046956" y="3795146"/>
+              <a:ext cx="429386" cy="276999"/>
+            </a:xfrm>
+            <a:prstGeom prst="rect">
+              <a:avLst/>
+            </a:prstGeom>
+            <a:noFill/>
+          </p:spPr>
+          <p:txBody>
+            <a:bodyPr wrap="square" rtlCol="0">
+              <a:spAutoFit/>
+            </a:bodyPr>
+            <a:lstStyle/>
+            <a:p>
+              <a:r>
+                <a:rPr lang="en-US" altLang="zh-CN" sz="1200" dirty="0">
+                  <a:latin typeface="Comic Sans MS" panose="030F0702030302020204" pitchFamily="66" charset="0"/>
+                </a:rPr>
+                <a:t>F6</a:t>
+              </a:r>
+              <a:endParaRPr lang="zh-CN" altLang="en-US" sz="1200" dirty="0">
+                <a:latin typeface="Comic Sans MS" panose="030F0702030302020204" pitchFamily="66" charset="0"/>
+              </a:endParaRPr>
+            </a:p>
+          </p:txBody>
+        </p:sp>
+      </p:grpSp>
+      <p:grpSp>
+        <p:nvGrpSpPr>
+          <p:cNvPr id="22" name="组合 21">
+            <a:extLst>
+              <a:ext uri="{FF2B5EF4-FFF2-40B4-BE49-F238E27FC236}">
+                <a16:creationId xmlns:a16="http://schemas.microsoft.com/office/drawing/2014/main" id="{A73F4F15-3994-A990-DB75-7D9264F20C51}"/>
+              </a:ext>
+            </a:extLst>
+          </p:cNvPr>
+          <p:cNvGrpSpPr/>
+          <p:nvPr/>
+        </p:nvGrpSpPr>
+        <p:grpSpPr>
+          <a:xfrm>
+            <a:off x="8108978" y="5553274"/>
+            <a:ext cx="384638" cy="276999"/>
+            <a:chOff x="7046956" y="3795146"/>
+            <a:chExt cx="384638" cy="276999"/>
+          </a:xfrm>
+        </p:grpSpPr>
+        <p:sp>
+          <p:nvSpPr>
+            <p:cNvPr id="24" name="矩形: 圆角 23">
+              <a:extLst>
+                <a:ext uri="{FF2B5EF4-FFF2-40B4-BE49-F238E27FC236}">
+                  <a16:creationId xmlns:a16="http://schemas.microsoft.com/office/drawing/2014/main" id="{05389687-9119-C888-3F37-A9CFF3E4BCF4}"/>
+                </a:ext>
+              </a:extLst>
+            </p:cNvPr>
+            <p:cNvSpPr>
+              <a:spLocks noChangeAspect="1"/>
+            </p:cNvSpPr>
+            <p:nvPr/>
+          </p:nvSpPr>
+          <p:spPr>
+            <a:xfrm>
+              <a:off x="7104502" y="3809699"/>
+              <a:ext cx="236602" cy="237534"/>
+            </a:xfrm>
+            <a:prstGeom prst="roundRect">
+              <a:avLst/>
+            </a:prstGeom>
+            <a:solidFill>
+              <a:schemeClr val="bg1"/>
+            </a:solidFill>
+            <a:ln>
+              <a:noFill/>
+            </a:ln>
+          </p:spPr>
+          <p:style>
+            <a:lnRef idx="2">
+              <a:schemeClr val="accent1">
+                <a:shade val="15000"/>
+              </a:schemeClr>
+            </a:lnRef>
+            <a:fillRef idx="1">
+              <a:schemeClr val="accent1"/>
+            </a:fillRef>
+            <a:effectRef idx="0">
+              <a:schemeClr val="accent1"/>
+            </a:effectRef>
+            <a:fontRef idx="minor">
+              <a:schemeClr val="lt1"/>
+            </a:fontRef>
+          </p:style>
+          <p:txBody>
+            <a:bodyPr rtlCol="0" anchor="ctr"/>
+            <a:lstStyle/>
+            <a:p>
+              <a:pPr algn="ctr"/>
+              <a:endParaRPr lang="zh-CN" altLang="en-US"/>
+            </a:p>
+          </p:txBody>
+        </p:sp>
+        <p:sp>
+          <p:nvSpPr>
+            <p:cNvPr id="25" name="文本框 24">
+              <a:extLst>
+                <a:ext uri="{FF2B5EF4-FFF2-40B4-BE49-F238E27FC236}">
+                  <a16:creationId xmlns:a16="http://schemas.microsoft.com/office/drawing/2014/main" id="{67655B80-67B3-E479-1E88-E2772679CC49}"/>
+                </a:ext>
+              </a:extLst>
+            </p:cNvPr>
+            <p:cNvSpPr txBox="1"/>
+            <p:nvPr/>
+          </p:nvSpPr>
+          <p:spPr>
+            <a:xfrm>
+              <a:off x="7046956" y="3795146"/>
+              <a:ext cx="384638" cy="276999"/>
+            </a:xfrm>
+            <a:prstGeom prst="rect">
+              <a:avLst/>
+            </a:prstGeom>
+            <a:noFill/>
+          </p:spPr>
+          <p:txBody>
+            <a:bodyPr wrap="square" rtlCol="0">
+              <a:spAutoFit/>
+            </a:bodyPr>
+            <a:lstStyle/>
+            <a:p>
+              <a:r>
+                <a:rPr lang="en-US" altLang="zh-CN" sz="1200" dirty="0">
+                  <a:latin typeface="Comic Sans MS" panose="030F0702030302020204" pitchFamily="66" charset="0"/>
+                </a:rPr>
+                <a:t>F5</a:t>
+              </a:r>
+              <a:endParaRPr lang="zh-CN" altLang="en-US" sz="1200" dirty="0">
+                <a:latin typeface="Comic Sans MS" panose="030F0702030302020204" pitchFamily="66" charset="0"/>
+              </a:endParaRPr>
+            </a:p>
+          </p:txBody>
+        </p:sp>
+      </p:grpSp>
+      <p:grpSp>
+        <p:nvGrpSpPr>
+          <p:cNvPr id="26" name="组合 25">
+            <a:extLst>
+              <a:ext uri="{FF2B5EF4-FFF2-40B4-BE49-F238E27FC236}">
+                <a16:creationId xmlns:a16="http://schemas.microsoft.com/office/drawing/2014/main" id="{32A6CE5D-C626-DC73-5FA3-A3DC4B8D54DD}"/>
+              </a:ext>
+            </a:extLst>
+          </p:cNvPr>
+          <p:cNvGrpSpPr/>
+          <p:nvPr/>
+        </p:nvGrpSpPr>
+        <p:grpSpPr>
+          <a:xfrm>
+            <a:off x="6837809" y="5553274"/>
+            <a:ext cx="495753" cy="276999"/>
+            <a:chOff x="7046956" y="3795146"/>
+            <a:chExt cx="495753" cy="276999"/>
+          </a:xfrm>
+        </p:grpSpPr>
+        <p:sp>
+          <p:nvSpPr>
+            <p:cNvPr id="27" name="矩形: 圆角 26">
+              <a:extLst>
+                <a:ext uri="{FF2B5EF4-FFF2-40B4-BE49-F238E27FC236}">
+                  <a16:creationId xmlns:a16="http://schemas.microsoft.com/office/drawing/2014/main" id="{7383ADE2-8865-BD9E-B861-89154166232F}"/>
+                </a:ext>
+              </a:extLst>
+            </p:cNvPr>
+            <p:cNvSpPr>
+              <a:spLocks noChangeAspect="1"/>
+            </p:cNvSpPr>
+            <p:nvPr/>
+          </p:nvSpPr>
+          <p:spPr>
+            <a:xfrm>
+              <a:off x="7104502" y="3809699"/>
+              <a:ext cx="236602" cy="237534"/>
+            </a:xfrm>
+            <a:prstGeom prst="roundRect">
+              <a:avLst/>
+            </a:prstGeom>
+            <a:solidFill>
+              <a:schemeClr val="bg1"/>
+            </a:solidFill>
+            <a:ln>
+              <a:noFill/>
+            </a:ln>
+          </p:spPr>
+          <p:style>
+            <a:lnRef idx="2">
+              <a:schemeClr val="accent1">
+                <a:shade val="15000"/>
+              </a:schemeClr>
+            </a:lnRef>
+            <a:fillRef idx="1">
+              <a:schemeClr val="accent1"/>
+            </a:fillRef>
+            <a:effectRef idx="0">
+              <a:schemeClr val="accent1"/>
+            </a:effectRef>
+            <a:fontRef idx="minor">
+              <a:schemeClr val="lt1"/>
+            </a:fontRef>
+          </p:style>
+          <p:txBody>
+            <a:bodyPr rtlCol="0" anchor="ctr"/>
+            <a:lstStyle/>
+            <a:p>
+              <a:pPr algn="ctr"/>
+              <a:endParaRPr lang="zh-CN" altLang="en-US"/>
+            </a:p>
+          </p:txBody>
+        </p:sp>
+        <p:sp>
+          <p:nvSpPr>
+            <p:cNvPr id="28" name="文本框 27">
+              <a:extLst>
+                <a:ext uri="{FF2B5EF4-FFF2-40B4-BE49-F238E27FC236}">
+                  <a16:creationId xmlns:a16="http://schemas.microsoft.com/office/drawing/2014/main" id="{0E22A5C6-906E-51B9-EB8B-E853B82C5774}"/>
+                </a:ext>
+              </a:extLst>
+            </p:cNvPr>
+            <p:cNvSpPr txBox="1"/>
+            <p:nvPr/>
+          </p:nvSpPr>
+          <p:spPr>
+            <a:xfrm>
+              <a:off x="7046956" y="3795146"/>
+              <a:ext cx="495753" cy="276999"/>
+            </a:xfrm>
+            <a:prstGeom prst="rect">
+              <a:avLst/>
+            </a:prstGeom>
+            <a:noFill/>
+          </p:spPr>
+          <p:txBody>
+            <a:bodyPr wrap="square" rtlCol="0">
+              <a:spAutoFit/>
+            </a:bodyPr>
+            <a:lstStyle/>
+            <a:p>
+              <a:r>
+                <a:rPr lang="en-US" altLang="zh-CN" sz="1200" dirty="0">
+                  <a:latin typeface="Comic Sans MS" panose="030F0702030302020204" pitchFamily="66" charset="0"/>
+                </a:rPr>
+                <a:t>F4</a:t>
+              </a:r>
+              <a:endParaRPr lang="zh-CN" altLang="en-US" sz="1200" dirty="0">
+                <a:latin typeface="Comic Sans MS" panose="030F0702030302020204" pitchFamily="66" charset="0"/>
+              </a:endParaRPr>
+            </a:p>
+          </p:txBody>
+        </p:sp>
+      </p:grpSp>
+    </p:spTree>
+    <p:extLst>
+      <p:ext uri="{BB962C8B-B14F-4D97-AF65-F5344CB8AC3E}">
+        <p14:creationId xmlns:p14="http://schemas.microsoft.com/office/powerpoint/2010/main" val="2409513380"/>
+      </p:ext>
+    </p:extLst>
+  </p:cSld>
+  <p:clrMapOvr>
+    <a:masterClrMapping/>
+  </p:clrMapOvr>
+</p:sld>
+</file>
+
+<file path=ppt/slides/slide3.xml><?xml version="1.0" encoding="utf-8"?>
+<p:sld xmlns:a="http://schemas.openxmlformats.org/drawingml/2006/main" xmlns:r="http://schemas.openxmlformats.org/officeDocument/2006/relationships" xmlns:p="http://schemas.openxmlformats.org/presentationml/2006/main">
+  <p:cSld>
+    <p:spTree>
+      <p:nvGrpSpPr>
+        <p:cNvPr id="1" name="">
+          <a:extLst>
+            <a:ext uri="{FF2B5EF4-FFF2-40B4-BE49-F238E27FC236}">
+              <a16:creationId xmlns:a16="http://schemas.microsoft.com/office/drawing/2014/main" id="{A34E1E3A-3533-ABF5-2234-DDE3B2D99178}"/>
+            </a:ext>
+          </a:extLst>
+        </p:cNvPr>
+        <p:cNvGrpSpPr/>
+        <p:nvPr/>
+      </p:nvGrpSpPr>
+      <p:grpSpPr>
+        <a:xfrm>
+          <a:off x="0" y="0"/>
+          <a:ext cx="0" cy="0"/>
+          <a:chOff x="0" y="0"/>
+          <a:chExt cx="0" cy="0"/>
+        </a:xfrm>
+      </p:grpSpPr>
+      <p:pic>
+        <p:nvPicPr>
+          <p:cNvPr id="7" name="图片 6">
+            <a:extLst>
+              <a:ext uri="{FF2B5EF4-FFF2-40B4-BE49-F238E27FC236}">
+                <a16:creationId xmlns:a16="http://schemas.microsoft.com/office/drawing/2014/main" id="{161A8371-C462-A57F-D637-468DB3AE2DB4}"/>
+              </a:ext>
+            </a:extLst>
+          </p:cNvPr>
+          <p:cNvPicPr>
+            <a:picLocks noChangeAspect="1"/>
+          </p:cNvPicPr>
+          <p:nvPr/>
+        </p:nvPicPr>
+        <p:blipFill>
+          <a:blip r:embed="rId2"/>
+          <a:stretch>
+            <a:fillRect/>
+          </a:stretch>
+        </p:blipFill>
+        <p:spPr>
+          <a:xfrm>
+            <a:off x="495950" y="16186"/>
+            <a:ext cx="12163225" cy="6841814"/>
+          </a:xfrm>
+          <a:prstGeom prst="rect">
+            <a:avLst/>
+          </a:prstGeom>
+        </p:spPr>
+      </p:pic>
+      <p:pic>
+        <p:nvPicPr>
+          <p:cNvPr id="9" name="图片 8">
+            <a:extLst>
+              <a:ext uri="{FF2B5EF4-FFF2-40B4-BE49-F238E27FC236}">
+                <a16:creationId xmlns:a16="http://schemas.microsoft.com/office/drawing/2014/main" id="{74E641DF-9EB3-5B73-84F7-CFE3AE2839C5}"/>
+              </a:ext>
+            </a:extLst>
+          </p:cNvPr>
+          <p:cNvPicPr>
+            <a:picLocks noChangeAspect="1"/>
+          </p:cNvPicPr>
+          <p:nvPr/>
+        </p:nvPicPr>
+        <p:blipFill>
+          <a:blip r:embed="rId3">
+            <a:extLst>
+              <a:ext uri="{28A0092B-C50C-407E-A947-70E740481C1C}">
+                <a14:useLocalDpi xmlns:a14="http://schemas.microsoft.com/office/drawing/2010/main" val="0"/>
+              </a:ext>
+            </a:extLst>
+          </a:blip>
+          <a:srcRect r="23033"/>
+          <a:stretch>
+            <a:fillRect/>
+          </a:stretch>
+        </p:blipFill>
+        <p:spPr>
+          <a:xfrm>
+            <a:off x="6694854" y="1028423"/>
+            <a:ext cx="3721347" cy="4834890"/>
+          </a:xfrm>
+          <a:custGeom>
+            <a:avLst/>
+            <a:gdLst>
+              <a:gd name="connsiteX0" fmla="*/ 141895 w 3721347"/>
+              <a:gd name="connsiteY0" fmla="*/ 0 h 4834890"/>
+              <a:gd name="connsiteX1" fmla="*/ 3579452 w 3721347"/>
+              <a:gd name="connsiteY1" fmla="*/ 0 h 4834890"/>
+              <a:gd name="connsiteX2" fmla="*/ 3721347 w 3721347"/>
+              <a:gd name="connsiteY2" fmla="*/ 141895 h 4834890"/>
+              <a:gd name="connsiteX3" fmla="*/ 3721347 w 3721347"/>
+              <a:gd name="connsiteY3" fmla="*/ 4692995 h 4834890"/>
+              <a:gd name="connsiteX4" fmla="*/ 3579452 w 3721347"/>
+              <a:gd name="connsiteY4" fmla="*/ 4834890 h 4834890"/>
+              <a:gd name="connsiteX5" fmla="*/ 141895 w 3721347"/>
+              <a:gd name="connsiteY5" fmla="*/ 4834890 h 4834890"/>
+              <a:gd name="connsiteX6" fmla="*/ 0 w 3721347"/>
+              <a:gd name="connsiteY6" fmla="*/ 4692995 h 4834890"/>
+              <a:gd name="connsiteX7" fmla="*/ 0 w 3721347"/>
+              <a:gd name="connsiteY7" fmla="*/ 141895 h 4834890"/>
+              <a:gd name="connsiteX8" fmla="*/ 141895 w 3721347"/>
+              <a:gd name="connsiteY8" fmla="*/ 0 h 4834890"/>
+            </a:gdLst>
+            <a:ahLst/>
+            <a:cxnLst>
+              <a:cxn ang="0">
+                <a:pos x="connsiteX0" y="connsiteY0"/>
+              </a:cxn>
+              <a:cxn ang="0">
+                <a:pos x="connsiteX1" y="connsiteY1"/>
+              </a:cxn>
+              <a:cxn ang="0">
+                <a:pos x="connsiteX2" y="connsiteY2"/>
+              </a:cxn>
+              <a:cxn ang="0">
+                <a:pos x="connsiteX3" y="connsiteY3"/>
+              </a:cxn>
+              <a:cxn ang="0">
+                <a:pos x="connsiteX4" y="connsiteY4"/>
+              </a:cxn>
+              <a:cxn ang="0">
+                <a:pos x="connsiteX5" y="connsiteY5"/>
+              </a:cxn>
+              <a:cxn ang="0">
+                <a:pos x="connsiteX6" y="connsiteY6"/>
+              </a:cxn>
+              <a:cxn ang="0">
+                <a:pos x="connsiteX7" y="connsiteY7"/>
+              </a:cxn>
+              <a:cxn ang="0">
+                <a:pos x="connsiteX8" y="connsiteY8"/>
+              </a:cxn>
+            </a:cxnLst>
+            <a:rect l="l" t="t" r="r" b="b"/>
+            <a:pathLst>
+              <a:path w="3721347" h="4834890">
+                <a:moveTo>
+                  <a:pt x="141895" y="0"/>
+                </a:moveTo>
+                <a:lnTo>
+                  <a:pt x="3579452" y="0"/>
+                </a:lnTo>
+                <a:cubicBezTo>
+                  <a:pt x="3657818" y="0"/>
+                  <a:pt x="3721347" y="63529"/>
+                  <a:pt x="3721347" y="141895"/>
+                </a:cubicBezTo>
+                <a:lnTo>
+                  <a:pt x="3721347" y="4692995"/>
+                </a:lnTo>
+                <a:cubicBezTo>
+                  <a:pt x="3721347" y="4771361"/>
+                  <a:pt x="3657818" y="4834890"/>
+                  <a:pt x="3579452" y="4834890"/>
+                </a:cubicBezTo>
+                <a:lnTo>
+                  <a:pt x="141895" y="4834890"/>
+                </a:lnTo>
+                <a:cubicBezTo>
+                  <a:pt x="63529" y="4834890"/>
+                  <a:pt x="0" y="4771361"/>
+                  <a:pt x="0" y="4692995"/>
+                </a:cubicBezTo>
+                <a:lnTo>
+                  <a:pt x="0" y="141895"/>
+                </a:lnTo>
+                <a:cubicBezTo>
+                  <a:pt x="0" y="63529"/>
+                  <a:pt x="63529" y="0"/>
+                  <a:pt x="141895" y="0"/>
+                </a:cubicBezTo>
+                <a:close/>
+              </a:path>
+            </a:pathLst>
+          </a:custGeom>
+        </p:spPr>
+      </p:pic>
+    </p:spTree>
+    <p:extLst>
+      <p:ext uri="{BB962C8B-B14F-4D97-AF65-F5344CB8AC3E}">
+        <p14:creationId xmlns:p14="http://schemas.microsoft.com/office/powerpoint/2010/main" val="4025499589"/>
+      </p:ext>
+    </p:extLst>
+  </p:cSld>
+  <p:clrMapOvr>
+    <a:masterClrMapping/>
+  </p:clrMapOvr>
+</p:sld>
+</file>
+
+<file path=ppt/slides/slide4.xml><?xml version="1.0" encoding="utf-8"?>
+<p:sld xmlns:a="http://schemas.openxmlformats.org/drawingml/2006/main" xmlns:r="http://schemas.openxmlformats.org/officeDocument/2006/relationships" xmlns:p="http://schemas.openxmlformats.org/presentationml/2006/main">
+  <p:cSld>
+    <p:spTree>
+      <p:nvGrpSpPr>
+        <p:cNvPr id="1" name="">
+          <a:extLst>
+            <a:ext uri="{FF2B5EF4-FFF2-40B4-BE49-F238E27FC236}">
+              <a16:creationId xmlns:a16="http://schemas.microsoft.com/office/drawing/2014/main" id="{8800E25B-FBDC-3B3D-0C03-6D2FA952AF81}"/>
+            </a:ext>
+          </a:extLst>
+        </p:cNvPr>
+        <p:cNvGrpSpPr/>
+        <p:nvPr/>
+      </p:nvGrpSpPr>
+      <p:grpSpPr>
+        <a:xfrm>
+          <a:off x="0" y="0"/>
+          <a:ext cx="0" cy="0"/>
+          <a:chOff x="0" y="0"/>
+          <a:chExt cx="0" cy="0"/>
+        </a:xfrm>
+      </p:grpSpPr>
+      <p:sp>
+        <p:nvSpPr>
+          <p:cNvPr id="2" name="矩形 1">
+            <a:extLst>
+              <a:ext uri="{FF2B5EF4-FFF2-40B4-BE49-F238E27FC236}">
+                <a16:creationId xmlns:a16="http://schemas.microsoft.com/office/drawing/2014/main" id="{01E4253B-8688-2C94-4EF5-BEFB6AD9409D}"/>
+              </a:ext>
+            </a:extLst>
+          </p:cNvPr>
+          <p:cNvSpPr/>
+          <p:nvPr/>
+        </p:nvSpPr>
+        <p:spPr>
+          <a:xfrm>
+            <a:off x="495950" y="16186"/>
+            <a:ext cx="12163225" cy="6825628"/>
+          </a:xfrm>
+          <a:prstGeom prst="rect">
+            <a:avLst/>
+          </a:prstGeom>
+          <a:noFill/>
+          <a:ln>
+            <a:noFill/>
+          </a:ln>
+        </p:spPr>
+        <p:style>
+          <a:lnRef idx="2">
+            <a:schemeClr val="accent1">
+              <a:shade val="15000"/>
+            </a:schemeClr>
+          </a:lnRef>
+          <a:fillRef idx="1">
+            <a:schemeClr val="accent1"/>
+          </a:fillRef>
+          <a:effectRef idx="0">
+            <a:schemeClr val="accent1"/>
+          </a:effectRef>
+          <a:fontRef idx="minor">
+            <a:schemeClr val="lt1"/>
+          </a:fontRef>
+        </p:style>
+        <p:txBody>
+          <a:bodyPr rtlCol="0" anchor="ctr"/>
+          <a:lstStyle/>
+          <a:p>
+            <a:pPr algn="ctr"/>
+            <a:endParaRPr lang="zh-CN" altLang="en-US"/>
+          </a:p>
+        </p:txBody>
+      </p:sp>
+      <p:sp>
+        <p:nvSpPr>
+          <p:cNvPr id="13" name="文本框 12">
+            <a:extLst>
+              <a:ext uri="{FF2B5EF4-FFF2-40B4-BE49-F238E27FC236}">
+                <a16:creationId xmlns:a16="http://schemas.microsoft.com/office/drawing/2014/main" id="{CAA32DF8-FCA5-D76C-DC20-2B33F98C94DE}"/>
+              </a:ext>
+            </a:extLst>
+          </p:cNvPr>
+          <p:cNvSpPr txBox="1"/>
+          <p:nvPr/>
+        </p:nvSpPr>
+        <p:spPr>
+          <a:xfrm>
+            <a:off x="6381049" y="1104979"/>
+            <a:ext cx="4348955" cy="707886"/>
+          </a:xfrm>
+          <a:prstGeom prst="rect">
+            <a:avLst/>
+          </a:prstGeom>
+          <a:noFill/>
+        </p:spPr>
+        <p:txBody>
+          <a:bodyPr wrap="square" rtlCol="0">
+            <a:spAutoFit/>
+          </a:bodyPr>
+          <a:lstStyle/>
+          <a:p>
+            <a:pPr algn="ctr"/>
+            <a:r>
+              <a:rPr lang="zh-CN" altLang="en-US" sz="1600" dirty="0">
+                <a:solidFill>
+                  <a:schemeClr val="bg1"/>
+                </a:solidFill>
+                <a:latin typeface="华文隶书" panose="02010800040101010101" pitchFamily="2" charset="-122"/>
+                <a:ea typeface="华文隶书" panose="02010800040101010101" pitchFamily="2" charset="-122"/>
+                <a:cs typeface="MV Boli" panose="02000500030200090000" pitchFamily="2" charset="0"/>
+              </a:rPr>
+              <a:t>使用</a:t>
+            </a:r>
+            <a:r>
+              <a:rPr lang="zh-CN" altLang="en-US" sz="2000" b="1" dirty="0">
+                <a:solidFill>
+                  <a:schemeClr val="bg1"/>
+                </a:solidFill>
+                <a:latin typeface="华文隶书" panose="02010800040101010101" pitchFamily="2" charset="-122"/>
+                <a:ea typeface="华文隶书" panose="02010800040101010101" pitchFamily="2" charset="-122"/>
+                <a:cs typeface="MV Boli" panose="02000500030200090000" pitchFamily="2" charset="0"/>
+              </a:rPr>
+              <a:t>方向键</a:t>
+            </a:r>
+            <a:r>
+              <a:rPr lang="zh-CN" altLang="en-US" sz="1600" dirty="0">
+                <a:solidFill>
+                  <a:schemeClr val="bg1"/>
+                </a:solidFill>
+                <a:latin typeface="华文隶书" panose="02010800040101010101" pitchFamily="2" charset="-122"/>
+                <a:ea typeface="华文隶书" panose="02010800040101010101" pitchFamily="2" charset="-122"/>
+                <a:cs typeface="MV Boli" panose="02000500030200090000" pitchFamily="2" charset="0"/>
+              </a:rPr>
+              <a:t>选择</a:t>
+            </a:r>
+            <a:endParaRPr lang="en-US" altLang="zh-CN" sz="1600" dirty="0">
+              <a:solidFill>
+                <a:schemeClr val="bg1"/>
+              </a:solidFill>
+              <a:latin typeface="华文隶书" panose="02010800040101010101" pitchFamily="2" charset="-122"/>
+              <a:ea typeface="华文隶书" panose="02010800040101010101" pitchFamily="2" charset="-122"/>
+              <a:cs typeface="MV Boli" panose="02000500030200090000" pitchFamily="2" charset="0"/>
+            </a:endParaRPr>
+          </a:p>
+          <a:p>
+            <a:pPr algn="ctr"/>
+            <a:r>
+              <a:rPr lang="zh-CN" altLang="en-US" sz="1600" dirty="0">
+                <a:solidFill>
+                  <a:schemeClr val="bg1"/>
+                </a:solidFill>
+                <a:latin typeface="华文隶书" panose="02010800040101010101" pitchFamily="2" charset="-122"/>
+                <a:ea typeface="华文隶书" panose="02010800040101010101" pitchFamily="2" charset="-122"/>
+                <a:cs typeface="MV Boli" panose="02000500030200090000" pitchFamily="2" charset="0"/>
+              </a:rPr>
+              <a:t>按</a:t>
+            </a:r>
+            <a:r>
+              <a:rPr lang="zh-CN" altLang="en-US" sz="2000" b="1" dirty="0">
+                <a:solidFill>
+                  <a:schemeClr val="bg1"/>
+                </a:solidFill>
+                <a:latin typeface="华文隶书" panose="02010800040101010101" pitchFamily="2" charset="-122"/>
+                <a:ea typeface="华文隶书" panose="02010800040101010101" pitchFamily="2" charset="-122"/>
+                <a:cs typeface="MV Boli" panose="02000500030200090000" pitchFamily="2" charset="0"/>
+              </a:rPr>
+              <a:t>回车键</a:t>
+            </a:r>
+            <a:r>
+              <a:rPr lang="zh-CN" altLang="en-US" sz="1600" dirty="0">
+                <a:solidFill>
+                  <a:schemeClr val="bg1"/>
+                </a:solidFill>
+                <a:latin typeface="华文隶书" panose="02010800040101010101" pitchFamily="2" charset="-122"/>
+                <a:ea typeface="华文隶书" panose="02010800040101010101" pitchFamily="2" charset="-122"/>
+                <a:cs typeface="MV Boli" panose="02000500030200090000" pitchFamily="2" charset="0"/>
+              </a:rPr>
+              <a:t>确认</a:t>
+            </a:r>
+            <a:endParaRPr lang="en-US" altLang="zh-CN" sz="1600" dirty="0">
+              <a:solidFill>
+                <a:schemeClr val="bg1"/>
+              </a:solidFill>
+              <a:latin typeface="华文隶书" panose="02010800040101010101" pitchFamily="2" charset="-122"/>
+              <a:ea typeface="华文隶书" panose="02010800040101010101" pitchFamily="2" charset="-122"/>
+              <a:cs typeface="MV Boli" panose="02000500030200090000" pitchFamily="2" charset="0"/>
+            </a:endParaRPr>
+          </a:p>
+        </p:txBody>
+      </p:sp>
+      <p:sp>
+        <p:nvSpPr>
+          <p:cNvPr id="16" name="文本框 15">
+            <a:extLst>
+              <a:ext uri="{FF2B5EF4-FFF2-40B4-BE49-F238E27FC236}">
+                <a16:creationId xmlns:a16="http://schemas.microsoft.com/office/drawing/2014/main" id="{9D739D1B-8D49-AC40-095F-385423A1642F}"/>
+              </a:ext>
+            </a:extLst>
+          </p:cNvPr>
+          <p:cNvSpPr txBox="1"/>
+          <p:nvPr/>
+        </p:nvSpPr>
+        <p:spPr>
+          <a:xfrm>
+            <a:off x="7184592" y="5261020"/>
+            <a:ext cx="948431" cy="276999"/>
+          </a:xfrm>
+          <a:prstGeom prst="rect">
+            <a:avLst/>
+          </a:prstGeom>
+          <a:noFill/>
+        </p:spPr>
+        <p:txBody>
+          <a:bodyPr wrap="square" rtlCol="0">
+            <a:spAutoFit/>
+          </a:bodyPr>
+          <a:lstStyle/>
+          <a:p>
+            <a:r>
+              <a:rPr lang="zh-CN" altLang="en-US" sz="1200" dirty="0">
+                <a:solidFill>
+                  <a:schemeClr val="bg1"/>
+                </a:solidFill>
+                <a:latin typeface="华文隶书" panose="02010800040101010101" pitchFamily="2" charset="-122"/>
+                <a:ea typeface="华文隶书" panose="02010800040101010101" pitchFamily="2" charset="-122"/>
+                <a:cs typeface="Cascadia Code" panose="020B0609020000020004" pitchFamily="49" charset="0"/>
+              </a:rPr>
+              <a:t>帮助</a:t>
+            </a:r>
+            <a:endParaRPr lang="en-US" altLang="zh-CN" sz="1200" dirty="0">
+              <a:solidFill>
+                <a:schemeClr val="bg1"/>
+              </a:solidFill>
+              <a:latin typeface="华文隶书" panose="02010800040101010101" pitchFamily="2" charset="-122"/>
+              <a:ea typeface="华文隶书" panose="02010800040101010101" pitchFamily="2" charset="-122"/>
+              <a:cs typeface="Cascadia Code" panose="020B0609020000020004" pitchFamily="49" charset="0"/>
+            </a:endParaRPr>
+          </a:p>
+        </p:txBody>
+      </p:sp>
+      <p:sp>
+        <p:nvSpPr>
+          <p:cNvPr id="19" name="文本框 18">
+            <a:extLst>
+              <a:ext uri="{FF2B5EF4-FFF2-40B4-BE49-F238E27FC236}">
+                <a16:creationId xmlns:a16="http://schemas.microsoft.com/office/drawing/2014/main" id="{C23FD1D4-91E9-4F85-9FEE-8360811A7AAF}"/>
+              </a:ext>
+            </a:extLst>
+          </p:cNvPr>
+          <p:cNvSpPr txBox="1"/>
+          <p:nvPr/>
+        </p:nvSpPr>
+        <p:spPr>
+          <a:xfrm>
+            <a:off x="7179010" y="5553274"/>
+            <a:ext cx="1478595" cy="276999"/>
+          </a:xfrm>
+          <a:prstGeom prst="rect">
+            <a:avLst/>
+          </a:prstGeom>
+          <a:noFill/>
+        </p:spPr>
+        <p:txBody>
+          <a:bodyPr wrap="square" rtlCol="0">
+            <a:spAutoFit/>
+          </a:bodyPr>
+          <a:lstStyle/>
+          <a:p>
+            <a:r>
+              <a:rPr lang="zh-CN" altLang="en-US" sz="1200" dirty="0">
+                <a:solidFill>
+                  <a:schemeClr val="bg1"/>
+                </a:solidFill>
+                <a:latin typeface="华文隶书" panose="02010800040101010101" pitchFamily="2" charset="-122"/>
+                <a:ea typeface="华文隶书" panose="02010800040101010101" pitchFamily="2" charset="-122"/>
+                <a:cs typeface="Cascadia Code" panose="020B0609020000020004" pitchFamily="49" charset="0"/>
+              </a:rPr>
+              <a:t>本地启动</a:t>
+            </a:r>
+            <a:endParaRPr lang="en-US" altLang="zh-CN" sz="1200" dirty="0">
+              <a:solidFill>
+                <a:schemeClr val="bg1"/>
+              </a:solidFill>
+              <a:latin typeface="华文隶书" panose="02010800040101010101" pitchFamily="2" charset="-122"/>
+              <a:ea typeface="华文隶书" panose="02010800040101010101" pitchFamily="2" charset="-122"/>
+              <a:cs typeface="Cascadia Code" panose="020B0609020000020004" pitchFamily="49" charset="0"/>
+            </a:endParaRPr>
+          </a:p>
+        </p:txBody>
+      </p:sp>
+      <p:sp>
+        <p:nvSpPr>
+          <p:cNvPr id="21" name="文本框 20">
+            <a:extLst>
+              <a:ext uri="{FF2B5EF4-FFF2-40B4-BE49-F238E27FC236}">
+                <a16:creationId xmlns:a16="http://schemas.microsoft.com/office/drawing/2014/main" id="{75D63417-A292-80FD-06E0-9722D28FC1C9}"/>
+              </a:ext>
+            </a:extLst>
+          </p:cNvPr>
+          <p:cNvSpPr txBox="1"/>
+          <p:nvPr/>
+        </p:nvSpPr>
+        <p:spPr>
+          <a:xfrm>
+            <a:off x="8404970" y="5553274"/>
+            <a:ext cx="948431" cy="276999"/>
+          </a:xfrm>
+          <a:prstGeom prst="rect">
+            <a:avLst/>
+          </a:prstGeom>
+          <a:noFill/>
+        </p:spPr>
+        <p:txBody>
+          <a:bodyPr wrap="square" rtlCol="0">
+            <a:spAutoFit/>
+          </a:bodyPr>
+          <a:lstStyle/>
+          <a:p>
+            <a:r>
+              <a:rPr lang="zh-CN" altLang="en-US" sz="1200" dirty="0">
+                <a:solidFill>
+                  <a:schemeClr val="bg1"/>
+                </a:solidFill>
+                <a:latin typeface="华文隶书" panose="02010800040101010101" pitchFamily="2" charset="-122"/>
+                <a:ea typeface="华文隶书" panose="02010800040101010101" pitchFamily="2" charset="-122"/>
+                <a:cs typeface="Cascadia Code" panose="020B0609020000020004" pitchFamily="49" charset="0"/>
+              </a:rPr>
+              <a:t>工具</a:t>
+            </a:r>
+            <a:endParaRPr lang="en-US" altLang="zh-CN" sz="1200" dirty="0">
+              <a:solidFill>
+                <a:schemeClr val="bg1"/>
+              </a:solidFill>
+              <a:latin typeface="华文隶书" panose="02010800040101010101" pitchFamily="2" charset="-122"/>
+              <a:ea typeface="华文隶书" panose="02010800040101010101" pitchFamily="2" charset="-122"/>
+              <a:cs typeface="Cascadia Code" panose="020B0609020000020004" pitchFamily="49" charset="0"/>
+            </a:endParaRPr>
+          </a:p>
+        </p:txBody>
+      </p:sp>
+      <p:sp>
+        <p:nvSpPr>
+          <p:cNvPr id="23" name="文本框 22">
+            <a:extLst>
+              <a:ext uri="{FF2B5EF4-FFF2-40B4-BE49-F238E27FC236}">
+                <a16:creationId xmlns:a16="http://schemas.microsoft.com/office/drawing/2014/main" id="{ED659B80-A22C-B416-DED8-8BA5E336294C}"/>
+              </a:ext>
+            </a:extLst>
+          </p:cNvPr>
+          <p:cNvSpPr txBox="1"/>
+          <p:nvPr/>
+        </p:nvSpPr>
+        <p:spPr>
+          <a:xfrm>
+            <a:off x="9494076" y="5261020"/>
+            <a:ext cx="1374810" cy="276999"/>
+          </a:xfrm>
+          <a:prstGeom prst="rect">
+            <a:avLst/>
+          </a:prstGeom>
+          <a:noFill/>
+        </p:spPr>
+        <p:txBody>
+          <a:bodyPr wrap="square" rtlCol="0">
+            <a:spAutoFit/>
+          </a:bodyPr>
+          <a:lstStyle/>
+          <a:p>
+            <a:r>
+              <a:rPr lang="zh-CN" altLang="en-US" sz="1200" dirty="0">
+                <a:solidFill>
+                  <a:schemeClr val="bg1"/>
+                </a:solidFill>
+                <a:latin typeface="华文隶书" panose="02010800040101010101" pitchFamily="2" charset="-122"/>
+                <a:ea typeface="华文隶书" panose="02010800040101010101" pitchFamily="2" charset="-122"/>
+                <a:cs typeface="Cascadia Code" panose="020B0609020000020004" pitchFamily="49" charset="0"/>
+              </a:rPr>
+              <a:t>树状图</a:t>
+            </a:r>
+            <a:endParaRPr lang="en-US" altLang="zh-CN" sz="1200" dirty="0">
+              <a:solidFill>
+                <a:schemeClr val="bg1"/>
+              </a:solidFill>
+              <a:latin typeface="华文隶书" panose="02010800040101010101" pitchFamily="2" charset="-122"/>
+              <a:ea typeface="华文隶书" panose="02010800040101010101" pitchFamily="2" charset="-122"/>
+              <a:cs typeface="Cascadia Code" panose="020B0609020000020004" pitchFamily="49" charset="0"/>
+            </a:endParaRPr>
+          </a:p>
+        </p:txBody>
+      </p:sp>
+      <p:sp>
+        <p:nvSpPr>
+          <p:cNvPr id="34" name="文本框 33">
+            <a:extLst>
+              <a:ext uri="{FF2B5EF4-FFF2-40B4-BE49-F238E27FC236}">
+                <a16:creationId xmlns:a16="http://schemas.microsoft.com/office/drawing/2014/main" id="{5B95973A-0634-07EA-F5F6-CE9C29785216}"/>
+              </a:ext>
+            </a:extLst>
+          </p:cNvPr>
+          <p:cNvSpPr txBox="1"/>
+          <p:nvPr/>
+        </p:nvSpPr>
+        <p:spPr>
+          <a:xfrm>
+            <a:off x="9492507" y="5553274"/>
+            <a:ext cx="1324885" cy="276999"/>
+          </a:xfrm>
+          <a:prstGeom prst="rect">
+            <a:avLst/>
+          </a:prstGeom>
+          <a:noFill/>
+        </p:spPr>
+        <p:txBody>
+          <a:bodyPr wrap="square" rtlCol="0">
+            <a:spAutoFit/>
+          </a:bodyPr>
+          <a:lstStyle/>
+          <a:p>
+            <a:r>
+              <a:rPr lang="zh-CN" altLang="en-US" sz="1200" dirty="0">
+                <a:solidFill>
+                  <a:schemeClr val="bg1"/>
+                </a:solidFill>
+                <a:latin typeface="华文隶书" panose="02010800040101010101" pitchFamily="2" charset="-122"/>
+                <a:ea typeface="华文隶书" panose="02010800040101010101" pitchFamily="2" charset="-122"/>
+                <a:cs typeface="Cascadia Code" panose="020B0609020000020004" pitchFamily="49" charset="0"/>
+              </a:rPr>
+              <a:t>扩展菜单</a:t>
+            </a:r>
+            <a:endParaRPr lang="en-US" altLang="zh-CN" sz="1200" dirty="0">
+              <a:solidFill>
+                <a:schemeClr val="bg1"/>
+              </a:solidFill>
+              <a:latin typeface="华文隶书" panose="02010800040101010101" pitchFamily="2" charset="-122"/>
+              <a:ea typeface="华文隶书" panose="02010800040101010101" pitchFamily="2" charset="-122"/>
+              <a:cs typeface="Cascadia Code" panose="020B0609020000020004" pitchFamily="49" charset="0"/>
+            </a:endParaRPr>
+          </a:p>
+        </p:txBody>
+      </p:sp>
+      <p:sp>
+        <p:nvSpPr>
+          <p:cNvPr id="35" name="文本框 34">
+            <a:extLst>
+              <a:ext uri="{FF2B5EF4-FFF2-40B4-BE49-F238E27FC236}">
+                <a16:creationId xmlns:a16="http://schemas.microsoft.com/office/drawing/2014/main" id="{A92140B5-5EEB-ECF2-E337-B7C9821EE318}"/>
+              </a:ext>
+            </a:extLst>
+          </p:cNvPr>
+          <p:cNvSpPr txBox="1"/>
+          <p:nvPr/>
+        </p:nvSpPr>
+        <p:spPr>
+          <a:xfrm>
+            <a:off x="8412465" y="5261020"/>
+            <a:ext cx="1195753" cy="276999"/>
+          </a:xfrm>
+          <a:prstGeom prst="rect">
+            <a:avLst/>
+          </a:prstGeom>
+          <a:noFill/>
+        </p:spPr>
+        <p:txBody>
+          <a:bodyPr wrap="square" rtlCol="0">
+            <a:spAutoFit/>
+          </a:bodyPr>
+          <a:lstStyle/>
+          <a:p>
+            <a:r>
+              <a:rPr lang="zh-CN" altLang="en-US" sz="1200" dirty="0">
+                <a:solidFill>
+                  <a:schemeClr val="bg1"/>
+                </a:solidFill>
+                <a:latin typeface="华文隶书" panose="02010800040101010101" pitchFamily="2" charset="-122"/>
+                <a:ea typeface="华文隶书" panose="02010800040101010101" pitchFamily="2" charset="-122"/>
+                <a:cs typeface="Cascadia Code" panose="020B0609020000020004" pitchFamily="49" charset="0"/>
+              </a:rPr>
+              <a:t>浏览</a:t>
+            </a:r>
+            <a:endParaRPr lang="en-US" altLang="zh-CN" sz="1200" dirty="0">
+              <a:solidFill>
+                <a:schemeClr val="bg1"/>
+              </a:solidFill>
+              <a:latin typeface="华文隶书" panose="02010800040101010101" pitchFamily="2" charset="-122"/>
+              <a:ea typeface="华文隶书" panose="02010800040101010101" pitchFamily="2" charset="-122"/>
+              <a:cs typeface="Cascadia Code" panose="020B0609020000020004" pitchFamily="49" charset="0"/>
+            </a:endParaRPr>
+          </a:p>
+        </p:txBody>
+      </p:sp>
+      <p:grpSp>
+        <p:nvGrpSpPr>
+          <p:cNvPr id="36" name="组合 35">
+            <a:extLst>
+              <a:ext uri="{FF2B5EF4-FFF2-40B4-BE49-F238E27FC236}">
+                <a16:creationId xmlns:a16="http://schemas.microsoft.com/office/drawing/2014/main" id="{5B40D446-AD78-F090-D516-F78C895613F4}"/>
+              </a:ext>
+            </a:extLst>
+          </p:cNvPr>
+          <p:cNvGrpSpPr/>
+          <p:nvPr/>
+        </p:nvGrpSpPr>
+        <p:grpSpPr>
+          <a:xfrm>
+            <a:off x="6844092" y="5261020"/>
+            <a:ext cx="363499" cy="276999"/>
+            <a:chOff x="7046956" y="3795146"/>
+            <a:chExt cx="363499" cy="276999"/>
+          </a:xfrm>
+        </p:grpSpPr>
+        <p:sp>
+          <p:nvSpPr>
+            <p:cNvPr id="37" name="矩形: 圆角 36">
+              <a:extLst>
+                <a:ext uri="{FF2B5EF4-FFF2-40B4-BE49-F238E27FC236}">
+                  <a16:creationId xmlns:a16="http://schemas.microsoft.com/office/drawing/2014/main" id="{25F490FB-63B1-16C0-E8F6-11AAD5328FA0}"/>
+                </a:ext>
+              </a:extLst>
+            </p:cNvPr>
+            <p:cNvSpPr>
+              <a:spLocks noChangeAspect="1"/>
+            </p:cNvSpPr>
+            <p:nvPr/>
+          </p:nvSpPr>
+          <p:spPr>
+            <a:xfrm>
+              <a:off x="7104502" y="3809699"/>
+              <a:ext cx="236602" cy="237534"/>
+            </a:xfrm>
+            <a:prstGeom prst="roundRect">
+              <a:avLst/>
+            </a:prstGeom>
+            <a:solidFill>
+              <a:schemeClr val="bg1"/>
+            </a:solidFill>
+            <a:ln>
+              <a:noFill/>
+            </a:ln>
+          </p:spPr>
+          <p:style>
+            <a:lnRef idx="2">
+              <a:schemeClr val="accent1">
+                <a:shade val="15000"/>
+              </a:schemeClr>
+            </a:lnRef>
+            <a:fillRef idx="1">
+              <a:schemeClr val="accent1"/>
+            </a:fillRef>
+            <a:effectRef idx="0">
+              <a:schemeClr val="accent1"/>
+            </a:effectRef>
+            <a:fontRef idx="minor">
+              <a:schemeClr val="lt1"/>
+            </a:fontRef>
+          </p:style>
+          <p:txBody>
+            <a:bodyPr rtlCol="0" anchor="ctr"/>
+            <a:lstStyle/>
+            <a:p>
+              <a:pPr algn="ctr"/>
+              <a:endParaRPr lang="zh-CN" altLang="en-US"/>
+            </a:p>
+          </p:txBody>
+        </p:sp>
+        <p:sp>
+          <p:nvSpPr>
+            <p:cNvPr id="38" name="文本框 37">
+              <a:extLst>
+                <a:ext uri="{FF2B5EF4-FFF2-40B4-BE49-F238E27FC236}">
+                  <a16:creationId xmlns:a16="http://schemas.microsoft.com/office/drawing/2014/main" id="{EBE88C8E-C068-D0C6-D9B4-2764B98586D0}"/>
+                </a:ext>
+              </a:extLst>
+            </p:cNvPr>
+            <p:cNvSpPr txBox="1"/>
+            <p:nvPr/>
+          </p:nvSpPr>
+          <p:spPr>
+            <a:xfrm>
+              <a:off x="7046956" y="3795146"/>
+              <a:ext cx="363499" cy="276999"/>
+            </a:xfrm>
+            <a:prstGeom prst="rect">
+              <a:avLst/>
+            </a:prstGeom>
+            <a:noFill/>
+          </p:spPr>
+          <p:txBody>
+            <a:bodyPr wrap="square" rtlCol="0">
+              <a:spAutoFit/>
+            </a:bodyPr>
+            <a:lstStyle/>
+            <a:p>
+              <a:r>
+                <a:rPr lang="en-US" altLang="zh-CN" sz="1200" dirty="0">
+                  <a:latin typeface="Comic Sans MS" panose="030F0702030302020204" pitchFamily="66" charset="0"/>
+                </a:rPr>
+                <a:t>F1</a:t>
+              </a:r>
+              <a:endParaRPr lang="zh-CN" altLang="en-US" sz="1200" dirty="0">
+                <a:latin typeface="Comic Sans MS" panose="030F0702030302020204" pitchFamily="66" charset="0"/>
+              </a:endParaRPr>
+            </a:p>
+          </p:txBody>
+        </p:sp>
+      </p:grpSp>
+      <p:grpSp>
+        <p:nvGrpSpPr>
+          <p:cNvPr id="39" name="组合 38">
+            <a:extLst>
+              <a:ext uri="{FF2B5EF4-FFF2-40B4-BE49-F238E27FC236}">
+                <a16:creationId xmlns:a16="http://schemas.microsoft.com/office/drawing/2014/main" id="{E3E63649-FFEC-804E-6601-8588ADCF474C}"/>
+              </a:ext>
+            </a:extLst>
+          </p:cNvPr>
+          <p:cNvGrpSpPr/>
+          <p:nvPr/>
+        </p:nvGrpSpPr>
+        <p:grpSpPr>
+          <a:xfrm>
+            <a:off x="8110853" y="5261020"/>
+            <a:ext cx="384638" cy="276999"/>
+            <a:chOff x="7046956" y="3795146"/>
+            <a:chExt cx="384638" cy="276999"/>
+          </a:xfrm>
+        </p:grpSpPr>
+        <p:sp>
+          <p:nvSpPr>
+            <p:cNvPr id="40" name="矩形: 圆角 39">
+              <a:extLst>
+                <a:ext uri="{FF2B5EF4-FFF2-40B4-BE49-F238E27FC236}">
+                  <a16:creationId xmlns:a16="http://schemas.microsoft.com/office/drawing/2014/main" id="{A9846F02-0D8B-42C3-7E1D-C11F0675891C}"/>
+                </a:ext>
+              </a:extLst>
+            </p:cNvPr>
+            <p:cNvSpPr>
+              <a:spLocks noChangeAspect="1"/>
+            </p:cNvSpPr>
+            <p:nvPr/>
+          </p:nvSpPr>
+          <p:spPr>
+            <a:xfrm>
+              <a:off x="7104502" y="3809699"/>
+              <a:ext cx="236602" cy="237534"/>
+            </a:xfrm>
+            <a:prstGeom prst="roundRect">
+              <a:avLst/>
+            </a:prstGeom>
+            <a:solidFill>
+              <a:schemeClr val="bg1"/>
+            </a:solidFill>
+            <a:ln>
+              <a:noFill/>
+            </a:ln>
+          </p:spPr>
+          <p:style>
+            <a:lnRef idx="2">
+              <a:schemeClr val="accent1">
+                <a:shade val="15000"/>
+              </a:schemeClr>
+            </a:lnRef>
+            <a:fillRef idx="1">
+              <a:schemeClr val="accent1"/>
+            </a:fillRef>
+            <a:effectRef idx="0">
+              <a:schemeClr val="accent1"/>
+            </a:effectRef>
+            <a:fontRef idx="minor">
+              <a:schemeClr val="lt1"/>
+            </a:fontRef>
+          </p:style>
+          <p:txBody>
+            <a:bodyPr rtlCol="0" anchor="ctr"/>
+            <a:lstStyle/>
+            <a:p>
+              <a:pPr algn="ctr"/>
+              <a:endParaRPr lang="zh-CN" altLang="en-US"/>
+            </a:p>
+          </p:txBody>
+        </p:sp>
+        <p:sp>
+          <p:nvSpPr>
+            <p:cNvPr id="41" name="文本框 40">
+              <a:extLst>
+                <a:ext uri="{FF2B5EF4-FFF2-40B4-BE49-F238E27FC236}">
+                  <a16:creationId xmlns:a16="http://schemas.microsoft.com/office/drawing/2014/main" id="{857BA98B-0BC4-32C0-0361-4EF6D33C956B}"/>
+                </a:ext>
+              </a:extLst>
+            </p:cNvPr>
+            <p:cNvSpPr txBox="1"/>
+            <p:nvPr/>
+          </p:nvSpPr>
+          <p:spPr>
+            <a:xfrm>
+              <a:off x="7046956" y="3795146"/>
+              <a:ext cx="384638" cy="276999"/>
+            </a:xfrm>
+            <a:prstGeom prst="rect">
+              <a:avLst/>
+            </a:prstGeom>
+            <a:noFill/>
+          </p:spPr>
+          <p:txBody>
+            <a:bodyPr wrap="square" rtlCol="0">
+              <a:spAutoFit/>
+            </a:bodyPr>
+            <a:lstStyle/>
+            <a:p>
+              <a:r>
+                <a:rPr lang="en-US" altLang="zh-CN" sz="1200" dirty="0">
+                  <a:latin typeface="Comic Sans MS" panose="030F0702030302020204" pitchFamily="66" charset="0"/>
+                </a:rPr>
+                <a:t>F2</a:t>
+              </a:r>
+              <a:endParaRPr lang="zh-CN" altLang="en-US" sz="1200" dirty="0">
+                <a:latin typeface="Comic Sans MS" panose="030F0702030302020204" pitchFamily="66" charset="0"/>
+              </a:endParaRPr>
+            </a:p>
+          </p:txBody>
+        </p:sp>
+      </p:grpSp>
+      <p:grpSp>
+        <p:nvGrpSpPr>
+          <p:cNvPr id="42" name="组合 41">
+            <a:extLst>
+              <a:ext uri="{FF2B5EF4-FFF2-40B4-BE49-F238E27FC236}">
+                <a16:creationId xmlns:a16="http://schemas.microsoft.com/office/drawing/2014/main" id="{FF9C1831-2850-2357-4125-6B6435ADEC1D}"/>
+              </a:ext>
+            </a:extLst>
+          </p:cNvPr>
+          <p:cNvGrpSpPr/>
+          <p:nvPr/>
+        </p:nvGrpSpPr>
+        <p:grpSpPr>
+          <a:xfrm>
+            <a:off x="9175346" y="5261020"/>
+            <a:ext cx="429386" cy="276999"/>
+            <a:chOff x="7046956" y="3795146"/>
+            <a:chExt cx="429386" cy="276999"/>
+          </a:xfrm>
+        </p:grpSpPr>
+        <p:sp>
+          <p:nvSpPr>
+            <p:cNvPr id="43" name="矩形: 圆角 42">
+              <a:extLst>
+                <a:ext uri="{FF2B5EF4-FFF2-40B4-BE49-F238E27FC236}">
+                  <a16:creationId xmlns:a16="http://schemas.microsoft.com/office/drawing/2014/main" id="{982A777E-07FB-7437-F09C-C03AE2F9441C}"/>
+                </a:ext>
+              </a:extLst>
+            </p:cNvPr>
+            <p:cNvSpPr>
+              <a:spLocks noChangeAspect="1"/>
+            </p:cNvSpPr>
+            <p:nvPr/>
+          </p:nvSpPr>
+          <p:spPr>
+            <a:xfrm>
+              <a:off x="7104502" y="3809699"/>
+              <a:ext cx="236602" cy="237534"/>
+            </a:xfrm>
+            <a:prstGeom prst="roundRect">
+              <a:avLst/>
+            </a:prstGeom>
+            <a:solidFill>
+              <a:schemeClr val="bg1"/>
+            </a:solidFill>
+            <a:ln>
+              <a:noFill/>
+            </a:ln>
+          </p:spPr>
+          <p:style>
+            <a:lnRef idx="2">
+              <a:schemeClr val="accent1">
+                <a:shade val="15000"/>
+              </a:schemeClr>
+            </a:lnRef>
+            <a:fillRef idx="1">
+              <a:schemeClr val="accent1"/>
+            </a:fillRef>
+            <a:effectRef idx="0">
+              <a:schemeClr val="accent1"/>
+            </a:effectRef>
+            <a:fontRef idx="minor">
+              <a:schemeClr val="lt1"/>
+            </a:fontRef>
+          </p:style>
+          <p:txBody>
+            <a:bodyPr rtlCol="0" anchor="ctr"/>
+            <a:lstStyle/>
+            <a:p>
+              <a:pPr algn="ctr"/>
+              <a:endParaRPr lang="zh-CN" altLang="en-US"/>
+            </a:p>
+          </p:txBody>
+        </p:sp>
+        <p:sp>
+          <p:nvSpPr>
+            <p:cNvPr id="44" name="文本框 43">
+              <a:extLst>
+                <a:ext uri="{FF2B5EF4-FFF2-40B4-BE49-F238E27FC236}">
+                  <a16:creationId xmlns:a16="http://schemas.microsoft.com/office/drawing/2014/main" id="{216FBC6F-5905-9074-3C23-FDF87DE44BE4}"/>
+                </a:ext>
+              </a:extLst>
+            </p:cNvPr>
+            <p:cNvSpPr txBox="1"/>
+            <p:nvPr/>
+          </p:nvSpPr>
+          <p:spPr>
+            <a:xfrm>
+              <a:off x="7046956" y="3795146"/>
+              <a:ext cx="429386" cy="276999"/>
+            </a:xfrm>
+            <a:prstGeom prst="rect">
+              <a:avLst/>
+            </a:prstGeom>
+            <a:noFill/>
+          </p:spPr>
+          <p:txBody>
+            <a:bodyPr wrap="square" rtlCol="0">
+              <a:spAutoFit/>
+            </a:bodyPr>
+            <a:lstStyle/>
+            <a:p>
+              <a:r>
+                <a:rPr lang="en-US" altLang="zh-CN" sz="1200" dirty="0">
+                  <a:latin typeface="Comic Sans MS" panose="030F0702030302020204" pitchFamily="66" charset="0"/>
+                </a:rPr>
+                <a:t>F3</a:t>
+              </a:r>
+              <a:endParaRPr lang="zh-CN" altLang="en-US" sz="1200" dirty="0">
+                <a:latin typeface="Comic Sans MS" panose="030F0702030302020204" pitchFamily="66" charset="0"/>
+              </a:endParaRPr>
+            </a:p>
+          </p:txBody>
+        </p:sp>
+      </p:grpSp>
+      <p:grpSp>
+        <p:nvGrpSpPr>
+          <p:cNvPr id="45" name="组合 44">
+            <a:extLst>
+              <a:ext uri="{FF2B5EF4-FFF2-40B4-BE49-F238E27FC236}">
+                <a16:creationId xmlns:a16="http://schemas.microsoft.com/office/drawing/2014/main" id="{D8C2DF93-D55B-818B-CF41-9F449BD6339F}"/>
+              </a:ext>
+            </a:extLst>
+          </p:cNvPr>
+          <p:cNvGrpSpPr/>
+          <p:nvPr/>
+        </p:nvGrpSpPr>
+        <p:grpSpPr>
+          <a:xfrm>
+            <a:off x="9175345" y="5553274"/>
+            <a:ext cx="429386" cy="276999"/>
+            <a:chOff x="7046956" y="3795146"/>
+            <a:chExt cx="429386" cy="276999"/>
+          </a:xfrm>
+        </p:grpSpPr>
+        <p:sp>
+          <p:nvSpPr>
+            <p:cNvPr id="46" name="矩形: 圆角 45">
+              <a:extLst>
+                <a:ext uri="{FF2B5EF4-FFF2-40B4-BE49-F238E27FC236}">
+                  <a16:creationId xmlns:a16="http://schemas.microsoft.com/office/drawing/2014/main" id="{A7630190-EE07-7C49-3CC6-9B1044443BC4}"/>
+                </a:ext>
+              </a:extLst>
+            </p:cNvPr>
+            <p:cNvSpPr>
+              <a:spLocks noChangeAspect="1"/>
+            </p:cNvSpPr>
+            <p:nvPr/>
+          </p:nvSpPr>
+          <p:spPr>
+            <a:xfrm>
+              <a:off x="7104502" y="3809699"/>
+              <a:ext cx="236602" cy="237534"/>
+            </a:xfrm>
+            <a:prstGeom prst="roundRect">
+              <a:avLst/>
+            </a:prstGeom>
+            <a:solidFill>
+              <a:schemeClr val="bg1"/>
+            </a:solidFill>
+            <a:ln>
+              <a:noFill/>
+            </a:ln>
+          </p:spPr>
+          <p:style>
+            <a:lnRef idx="2">
+              <a:schemeClr val="accent1">
+                <a:shade val="15000"/>
+              </a:schemeClr>
+            </a:lnRef>
+            <a:fillRef idx="1">
+              <a:schemeClr val="accent1"/>
+            </a:fillRef>
+            <a:effectRef idx="0">
+              <a:schemeClr val="accent1"/>
+            </a:effectRef>
+            <a:fontRef idx="minor">
+              <a:schemeClr val="lt1"/>
+            </a:fontRef>
+          </p:style>
+          <p:txBody>
+            <a:bodyPr rtlCol="0" anchor="ctr"/>
+            <a:lstStyle/>
+            <a:p>
+              <a:pPr algn="ctr"/>
+              <a:endParaRPr lang="zh-CN" altLang="en-US"/>
+            </a:p>
+          </p:txBody>
+        </p:sp>
+        <p:sp>
+          <p:nvSpPr>
+            <p:cNvPr id="47" name="文本框 46">
+              <a:extLst>
+                <a:ext uri="{FF2B5EF4-FFF2-40B4-BE49-F238E27FC236}">
+                  <a16:creationId xmlns:a16="http://schemas.microsoft.com/office/drawing/2014/main" id="{10F5526D-143C-E9E6-9B21-2D41BA3E9A69}"/>
+                </a:ext>
+              </a:extLst>
+            </p:cNvPr>
+            <p:cNvSpPr txBox="1"/>
+            <p:nvPr/>
+          </p:nvSpPr>
+          <p:spPr>
+            <a:xfrm>
+              <a:off x="7046956" y="3795146"/>
+              <a:ext cx="429386" cy="276999"/>
+            </a:xfrm>
+            <a:prstGeom prst="rect">
+              <a:avLst/>
+            </a:prstGeom>
+            <a:noFill/>
+          </p:spPr>
+          <p:txBody>
+            <a:bodyPr wrap="square" rtlCol="0">
+              <a:spAutoFit/>
+            </a:bodyPr>
+            <a:lstStyle/>
+            <a:p>
+              <a:r>
+                <a:rPr lang="en-US" altLang="zh-CN" sz="1200" dirty="0">
+                  <a:latin typeface="Comic Sans MS" panose="030F0702030302020204" pitchFamily="66" charset="0"/>
+                </a:rPr>
+                <a:t>F6</a:t>
+              </a:r>
+              <a:endParaRPr lang="zh-CN" altLang="en-US" sz="1200" dirty="0">
+                <a:latin typeface="Comic Sans MS" panose="030F0702030302020204" pitchFamily="66" charset="0"/>
+              </a:endParaRPr>
+            </a:p>
+          </p:txBody>
+        </p:sp>
+      </p:grpSp>
+      <p:grpSp>
+        <p:nvGrpSpPr>
+          <p:cNvPr id="48" name="组合 47">
+            <a:extLst>
+              <a:ext uri="{FF2B5EF4-FFF2-40B4-BE49-F238E27FC236}">
+                <a16:creationId xmlns:a16="http://schemas.microsoft.com/office/drawing/2014/main" id="{80124501-AD3A-F190-04F8-E9980837380E}"/>
+              </a:ext>
+            </a:extLst>
+          </p:cNvPr>
+          <p:cNvGrpSpPr/>
+          <p:nvPr/>
+        </p:nvGrpSpPr>
+        <p:grpSpPr>
+          <a:xfrm>
+            <a:off x="8108978" y="5553274"/>
+            <a:ext cx="384638" cy="276999"/>
+            <a:chOff x="7046956" y="3795146"/>
+            <a:chExt cx="384638" cy="276999"/>
+          </a:xfrm>
+        </p:grpSpPr>
+        <p:sp>
+          <p:nvSpPr>
+            <p:cNvPr id="49" name="矩形: 圆角 48">
+              <a:extLst>
+                <a:ext uri="{FF2B5EF4-FFF2-40B4-BE49-F238E27FC236}">
+                  <a16:creationId xmlns:a16="http://schemas.microsoft.com/office/drawing/2014/main" id="{94870BC1-24F1-9D8F-0EF1-59B2B477909C}"/>
+                </a:ext>
+              </a:extLst>
+            </p:cNvPr>
+            <p:cNvSpPr>
+              <a:spLocks noChangeAspect="1"/>
+            </p:cNvSpPr>
+            <p:nvPr/>
+          </p:nvSpPr>
+          <p:spPr>
+            <a:xfrm>
+              <a:off x="7104502" y="3809699"/>
+              <a:ext cx="236602" cy="237534"/>
+            </a:xfrm>
+            <a:prstGeom prst="roundRect">
+              <a:avLst/>
+            </a:prstGeom>
+            <a:solidFill>
+              <a:schemeClr val="bg1"/>
+            </a:solidFill>
+            <a:ln>
+              <a:noFill/>
+            </a:ln>
+          </p:spPr>
+          <p:style>
+            <a:lnRef idx="2">
+              <a:schemeClr val="accent1">
+                <a:shade val="15000"/>
+              </a:schemeClr>
+            </a:lnRef>
+            <a:fillRef idx="1">
+              <a:schemeClr val="accent1"/>
+            </a:fillRef>
+            <a:effectRef idx="0">
+              <a:schemeClr val="accent1"/>
+            </a:effectRef>
+            <a:fontRef idx="minor">
+              <a:schemeClr val="lt1"/>
+            </a:fontRef>
+          </p:style>
+          <p:txBody>
+            <a:bodyPr rtlCol="0" anchor="ctr"/>
+            <a:lstStyle/>
+            <a:p>
+              <a:pPr algn="ctr"/>
+              <a:endParaRPr lang="zh-CN" altLang="en-US"/>
+            </a:p>
+          </p:txBody>
+        </p:sp>
+        <p:sp>
+          <p:nvSpPr>
+            <p:cNvPr id="50" name="文本框 49">
+              <a:extLst>
+                <a:ext uri="{FF2B5EF4-FFF2-40B4-BE49-F238E27FC236}">
+                  <a16:creationId xmlns:a16="http://schemas.microsoft.com/office/drawing/2014/main" id="{FED88E97-2063-1B4E-FDA6-E542C2505B89}"/>
+                </a:ext>
+              </a:extLst>
+            </p:cNvPr>
+            <p:cNvSpPr txBox="1"/>
+            <p:nvPr/>
+          </p:nvSpPr>
+          <p:spPr>
+            <a:xfrm>
+              <a:off x="7046956" y="3795146"/>
+              <a:ext cx="384638" cy="276999"/>
+            </a:xfrm>
+            <a:prstGeom prst="rect">
+              <a:avLst/>
+            </a:prstGeom>
+            <a:noFill/>
+          </p:spPr>
+          <p:txBody>
+            <a:bodyPr wrap="square" rtlCol="0">
+              <a:spAutoFit/>
+            </a:bodyPr>
+            <a:lstStyle/>
+            <a:p>
+              <a:r>
+                <a:rPr lang="en-US" altLang="zh-CN" sz="1200" dirty="0">
+                  <a:latin typeface="Comic Sans MS" panose="030F0702030302020204" pitchFamily="66" charset="0"/>
+                </a:rPr>
+                <a:t>F5</a:t>
+              </a:r>
+              <a:endParaRPr lang="zh-CN" altLang="en-US" sz="1200" dirty="0">
+                <a:latin typeface="Comic Sans MS" panose="030F0702030302020204" pitchFamily="66" charset="0"/>
+              </a:endParaRPr>
+            </a:p>
+          </p:txBody>
+        </p:sp>
+      </p:grpSp>
+      <p:grpSp>
+        <p:nvGrpSpPr>
+          <p:cNvPr id="51" name="组合 50">
+            <a:extLst>
+              <a:ext uri="{FF2B5EF4-FFF2-40B4-BE49-F238E27FC236}">
+                <a16:creationId xmlns:a16="http://schemas.microsoft.com/office/drawing/2014/main" id="{63A6AA8D-CB31-E52E-4BFD-68E0E6C36F66}"/>
+              </a:ext>
+            </a:extLst>
+          </p:cNvPr>
+          <p:cNvGrpSpPr/>
+          <p:nvPr/>
+        </p:nvGrpSpPr>
+        <p:grpSpPr>
+          <a:xfrm>
+            <a:off x="6837809" y="5553274"/>
+            <a:ext cx="495753" cy="276999"/>
+            <a:chOff x="7046956" y="3795146"/>
+            <a:chExt cx="495753" cy="276999"/>
+          </a:xfrm>
+        </p:grpSpPr>
+        <p:sp>
+          <p:nvSpPr>
+            <p:cNvPr id="52" name="矩形: 圆角 51">
+              <a:extLst>
+                <a:ext uri="{FF2B5EF4-FFF2-40B4-BE49-F238E27FC236}">
+                  <a16:creationId xmlns:a16="http://schemas.microsoft.com/office/drawing/2014/main" id="{46612FCA-4C5D-EC7F-A949-B8871BB2E6F2}"/>
+                </a:ext>
+              </a:extLst>
+            </p:cNvPr>
+            <p:cNvSpPr>
+              <a:spLocks noChangeAspect="1"/>
+            </p:cNvSpPr>
+            <p:nvPr/>
+          </p:nvSpPr>
+          <p:spPr>
+            <a:xfrm>
+              <a:off x="7104502" y="3809699"/>
+              <a:ext cx="236602" cy="237534"/>
+            </a:xfrm>
+            <a:prstGeom prst="roundRect">
+              <a:avLst/>
+            </a:prstGeom>
+            <a:solidFill>
+              <a:schemeClr val="bg1"/>
+            </a:solidFill>
+            <a:ln>
+              <a:noFill/>
+            </a:ln>
+          </p:spPr>
+          <p:style>
+            <a:lnRef idx="2">
+              <a:schemeClr val="accent1">
+                <a:shade val="15000"/>
+              </a:schemeClr>
+            </a:lnRef>
+            <a:fillRef idx="1">
+              <a:schemeClr val="accent1"/>
+            </a:fillRef>
+            <a:effectRef idx="0">
+              <a:schemeClr val="accent1"/>
+            </a:effectRef>
+            <a:fontRef idx="minor">
+              <a:schemeClr val="lt1"/>
+            </a:fontRef>
+          </p:style>
+          <p:txBody>
+            <a:bodyPr rtlCol="0" anchor="ctr"/>
+            <a:lstStyle/>
+            <a:p>
+              <a:pPr algn="ctr"/>
+              <a:endParaRPr lang="zh-CN" altLang="en-US"/>
+            </a:p>
+          </p:txBody>
+        </p:sp>
+        <p:sp>
+          <p:nvSpPr>
+            <p:cNvPr id="53" name="文本框 52">
+              <a:extLst>
+                <a:ext uri="{FF2B5EF4-FFF2-40B4-BE49-F238E27FC236}">
+                  <a16:creationId xmlns:a16="http://schemas.microsoft.com/office/drawing/2014/main" id="{5D9D3A47-313C-1741-B0BF-81023852C542}"/>
+                </a:ext>
+              </a:extLst>
+            </p:cNvPr>
+            <p:cNvSpPr txBox="1"/>
+            <p:nvPr/>
+          </p:nvSpPr>
+          <p:spPr>
+            <a:xfrm>
+              <a:off x="7046956" y="3795146"/>
+              <a:ext cx="495753" cy="276999"/>
+            </a:xfrm>
+            <a:prstGeom prst="rect">
+              <a:avLst/>
+            </a:prstGeom>
+            <a:noFill/>
+          </p:spPr>
+          <p:txBody>
+            <a:bodyPr wrap="square" rtlCol="0">
+              <a:spAutoFit/>
+            </a:bodyPr>
+            <a:lstStyle/>
+            <a:p>
+              <a:r>
+                <a:rPr lang="en-US" altLang="zh-CN" sz="1200" dirty="0">
+                  <a:latin typeface="Comic Sans MS" panose="030F0702030302020204" pitchFamily="66" charset="0"/>
+                </a:rPr>
+                <a:t>F4</a:t>
+              </a:r>
+              <a:endParaRPr lang="zh-CN" altLang="en-US" sz="1200" dirty="0">
+                <a:latin typeface="Comic Sans MS" panose="030F0702030302020204" pitchFamily="66" charset="0"/>
+              </a:endParaRPr>
+            </a:p>
+          </p:txBody>
+        </p:sp>
+      </p:grpSp>
+    </p:spTree>
+    <p:extLst>
+      <p:ext uri="{BB962C8B-B14F-4D97-AF65-F5344CB8AC3E}">
+        <p14:creationId xmlns:p14="http://schemas.microsoft.com/office/powerpoint/2010/main" val="1006450137"/>
+      </p:ext>
+    </p:extLst>
+  </p:cSld>
+  <p:clrMapOvr>
+    <a:masterClrMapping/>
+  </p:clrMapOvr>
+</p:sld>
+</file>
+
+<file path=ppt/slides/slide5.xml><?xml version="1.0" encoding="utf-8"?>
+<p:sld xmlns:a="http://schemas.openxmlformats.org/drawingml/2006/main" xmlns:r="http://schemas.openxmlformats.org/officeDocument/2006/relationships" xmlns:p="http://schemas.openxmlformats.org/presentationml/2006/main">
+  <p:cSld>
+    <p:spTree>
+      <p:nvGrpSpPr>
+        <p:cNvPr id="1" name="">
+          <a:extLst>
+            <a:ext uri="{FF2B5EF4-FFF2-40B4-BE49-F238E27FC236}">
+              <a16:creationId xmlns:a16="http://schemas.microsoft.com/office/drawing/2014/main" id="{360D1D21-A409-D3BE-A03F-93F88CFDC5E1}"/>
+            </a:ext>
+          </a:extLst>
+        </p:cNvPr>
+        <p:cNvGrpSpPr/>
+        <p:nvPr/>
+      </p:nvGrpSpPr>
+      <p:grpSpPr>
+        <a:xfrm>
+          <a:off x="0" y="0"/>
+          <a:ext cx="0" cy="0"/>
+          <a:chOff x="0" y="0"/>
+          <a:chExt cx="0" cy="0"/>
+        </a:xfrm>
+      </p:grpSpPr>
+      <p:sp>
+        <p:nvSpPr>
+          <p:cNvPr id="2" name="矩形 1">
+            <a:extLst>
+              <a:ext uri="{FF2B5EF4-FFF2-40B4-BE49-F238E27FC236}">
+                <a16:creationId xmlns:a16="http://schemas.microsoft.com/office/drawing/2014/main" id="{A41F1CFA-34A9-A436-3019-6B5351C1E537}"/>
+              </a:ext>
+            </a:extLst>
+          </p:cNvPr>
+          <p:cNvSpPr/>
+          <p:nvPr/>
+        </p:nvSpPr>
+        <p:spPr>
+          <a:xfrm>
+            <a:off x="495950" y="16186"/>
+            <a:ext cx="12163225" cy="6825628"/>
+          </a:xfrm>
+          <a:prstGeom prst="rect">
+            <a:avLst/>
+          </a:prstGeom>
+          <a:noFill/>
+          <a:ln>
+            <a:noFill/>
+          </a:ln>
+        </p:spPr>
+        <p:style>
+          <a:lnRef idx="2">
+            <a:schemeClr val="accent1">
+              <a:shade val="15000"/>
+            </a:schemeClr>
+          </a:lnRef>
+          <a:fillRef idx="1">
+            <a:schemeClr val="accent1"/>
+          </a:fillRef>
+          <a:effectRef idx="0">
+            <a:schemeClr val="accent1"/>
+          </a:effectRef>
+          <a:fontRef idx="minor">
+            <a:schemeClr val="lt1"/>
+          </a:fontRef>
+        </p:style>
+        <p:txBody>
+          <a:bodyPr rtlCol="0" anchor="ctr"/>
+          <a:lstStyle/>
+          <a:p>
+            <a:pPr algn="ctr"/>
+            <a:endParaRPr lang="zh-CN" altLang="en-US"/>
+          </a:p>
+        </p:txBody>
+      </p:sp>
+      <p:pic>
+        <p:nvPicPr>
+          <p:cNvPr id="4" name="图片 3">
+            <a:extLst>
+              <a:ext uri="{FF2B5EF4-FFF2-40B4-BE49-F238E27FC236}">
+                <a16:creationId xmlns:a16="http://schemas.microsoft.com/office/drawing/2014/main" id="{AF890EF1-8F66-2142-9650-7618026702EE}"/>
+              </a:ext>
+            </a:extLst>
+          </p:cNvPr>
+          <p:cNvPicPr>
+            <a:picLocks noChangeAspect="1"/>
+          </p:cNvPicPr>
+          <p:nvPr/>
+        </p:nvPicPr>
+        <p:blipFill>
+          <a:blip r:embed="rId2">
+            <a:extLst>
+              <a:ext uri="{28A0092B-C50C-407E-A947-70E740481C1C}">
+                <a14:useLocalDpi xmlns:a14="http://schemas.microsoft.com/office/drawing/2010/main" val="0"/>
+              </a:ext>
+            </a:extLst>
+          </a:blip>
+          <a:srcRect l="52863" t="75643" r="21175" b="18258"/>
+          <a:stretch>
+            <a:fillRect/>
+          </a:stretch>
+        </p:blipFill>
+        <p:spPr>
+          <a:xfrm>
+            <a:off x="6495676" y="5366825"/>
+            <a:ext cx="3757368" cy="496488"/>
+          </a:xfrm>
+          <a:prstGeom prst="rect">
+            <a:avLst/>
+          </a:prstGeom>
+        </p:spPr>
+      </p:pic>
+      <p:sp>
+        <p:nvSpPr>
+          <p:cNvPr id="7" name="文本框 6">
+            <a:extLst>
+              <a:ext uri="{FF2B5EF4-FFF2-40B4-BE49-F238E27FC236}">
+                <a16:creationId xmlns:a16="http://schemas.microsoft.com/office/drawing/2014/main" id="{00B4F716-C8B9-F183-CE23-596E9595B880}"/>
+              </a:ext>
+            </a:extLst>
+          </p:cNvPr>
+          <p:cNvSpPr txBox="1"/>
+          <p:nvPr/>
+        </p:nvSpPr>
+        <p:spPr>
+          <a:xfrm>
+            <a:off x="6348401" y="1123096"/>
+            <a:ext cx="4348955" cy="646331"/>
+          </a:xfrm>
+          <a:prstGeom prst="rect">
+            <a:avLst/>
+          </a:prstGeom>
+          <a:noFill/>
+        </p:spPr>
+        <p:txBody>
+          <a:bodyPr wrap="square" rtlCol="0">
+            <a:spAutoFit/>
+          </a:bodyPr>
+          <a:lstStyle/>
+          <a:p>
+            <a:pPr algn="ctr"/>
+            <a:r>
+              <a:rPr lang="en-US" altLang="zh-CN" sz="1600" dirty="0">
+                <a:solidFill>
+                  <a:schemeClr val="bg1"/>
+                </a:solidFill>
+                <a:latin typeface="Comic Sans MS" panose="030F0702030302020204" pitchFamily="66" charset="0"/>
+                <a:ea typeface="MS PGothic" panose="020B0600070205080204" pitchFamily="34" charset="-128"/>
+                <a:cs typeface="MV Boli" panose="02000500030200090000" pitchFamily="2" charset="0"/>
+              </a:rPr>
+              <a:t>Use the </a:t>
+            </a:r>
+            <a:r>
+              <a:rPr lang="en-US" altLang="zh-CN" b="1" dirty="0">
+                <a:solidFill>
+                  <a:schemeClr val="bg1"/>
+                </a:solidFill>
+                <a:latin typeface="Comic Sans MS" panose="030F0702030302020204" pitchFamily="66" charset="0"/>
+                <a:ea typeface="MS PGothic" panose="020B0600070205080204" pitchFamily="34" charset="-128"/>
+                <a:cs typeface="MV Boli" panose="02000500030200090000" pitchFamily="2" charset="0"/>
+              </a:rPr>
+              <a:t>up</a:t>
+            </a:r>
+            <a:r>
+              <a:rPr lang="en-US" altLang="zh-CN" sz="1600" dirty="0">
+                <a:solidFill>
+                  <a:schemeClr val="bg1"/>
+                </a:solidFill>
+                <a:latin typeface="Comic Sans MS" panose="030F0702030302020204" pitchFamily="66" charset="0"/>
+                <a:ea typeface="MS PGothic" panose="020B0600070205080204" pitchFamily="34" charset="-128"/>
+                <a:cs typeface="MV Boli" panose="02000500030200090000" pitchFamily="2" charset="0"/>
+              </a:rPr>
+              <a:t> and </a:t>
+            </a:r>
+            <a:r>
+              <a:rPr lang="en-US" altLang="zh-CN" b="1" dirty="0">
+                <a:solidFill>
+                  <a:schemeClr val="bg1"/>
+                </a:solidFill>
+                <a:latin typeface="Comic Sans MS" panose="030F0702030302020204" pitchFamily="66" charset="0"/>
+                <a:ea typeface="MS PGothic" panose="020B0600070205080204" pitchFamily="34" charset="-128"/>
+                <a:cs typeface="MV Boli" panose="02000500030200090000" pitchFamily="2" charset="0"/>
+              </a:rPr>
+              <a:t>down</a:t>
+            </a:r>
+            <a:r>
+              <a:rPr lang="en-US" altLang="zh-CN" sz="1600" dirty="0">
+                <a:solidFill>
+                  <a:schemeClr val="bg1"/>
+                </a:solidFill>
+                <a:latin typeface="Comic Sans MS" panose="030F0702030302020204" pitchFamily="66" charset="0"/>
+                <a:ea typeface="MS PGothic" panose="020B0600070205080204" pitchFamily="34" charset="-128"/>
+                <a:cs typeface="MV Boli" panose="02000500030200090000" pitchFamily="2" charset="0"/>
+              </a:rPr>
+              <a:t> keys to select </a:t>
+            </a:r>
+          </a:p>
+          <a:p>
+            <a:pPr algn="ctr"/>
+            <a:r>
+              <a:rPr lang="en-US" altLang="zh-CN" sz="1600" dirty="0">
+                <a:solidFill>
+                  <a:schemeClr val="bg1"/>
+                </a:solidFill>
+                <a:latin typeface="Comic Sans MS" panose="030F0702030302020204" pitchFamily="66" charset="0"/>
+                <a:ea typeface="MS PGothic" panose="020B0600070205080204" pitchFamily="34" charset="-128"/>
+                <a:cs typeface="MV Boli" panose="02000500030200090000" pitchFamily="2" charset="0"/>
+              </a:rPr>
+              <a:t>Press </a:t>
+            </a:r>
+            <a:r>
+              <a:rPr lang="en-US" altLang="zh-CN" b="1" dirty="0">
+                <a:solidFill>
+                  <a:schemeClr val="bg1"/>
+                </a:solidFill>
+                <a:latin typeface="Comic Sans MS" panose="030F0702030302020204" pitchFamily="66" charset="0"/>
+                <a:ea typeface="MS PGothic" panose="020B0600070205080204" pitchFamily="34" charset="-128"/>
+                <a:cs typeface="MV Boli" panose="02000500030200090000" pitchFamily="2" charset="0"/>
+              </a:rPr>
+              <a:t>Enter</a:t>
+            </a:r>
+            <a:r>
+              <a:rPr lang="en-US" altLang="zh-CN" sz="1600" dirty="0">
+                <a:solidFill>
+                  <a:schemeClr val="bg1"/>
+                </a:solidFill>
+                <a:latin typeface="Comic Sans MS" panose="030F0702030302020204" pitchFamily="66" charset="0"/>
+                <a:ea typeface="MS PGothic" panose="020B0600070205080204" pitchFamily="34" charset="-128"/>
+                <a:cs typeface="MV Boli" panose="02000500030200090000" pitchFamily="2" charset="0"/>
+              </a:rPr>
+              <a:t> to confirm</a:t>
+            </a:r>
+          </a:p>
+        </p:txBody>
+      </p:sp>
+    </p:spTree>
+    <p:extLst>
+      <p:ext uri="{BB962C8B-B14F-4D97-AF65-F5344CB8AC3E}">
+        <p14:creationId xmlns:p14="http://schemas.microsoft.com/office/powerpoint/2010/main" val="1006966844"/>
+      </p:ext>
+    </p:extLst>
+  </p:cSld>
+  <p:clrMapOvr>
+    <a:masterClrMapping/>
+  </p:clrMapOvr>
+</p:sld>
+</file>
+
+<file path=ppt/slides/slide6.xml><?xml version="1.0" encoding="utf-8"?>
+<p:sld xmlns:a="http://schemas.openxmlformats.org/drawingml/2006/main" xmlns:r="http://schemas.openxmlformats.org/officeDocument/2006/relationships" xmlns:p="http://schemas.openxmlformats.org/presentationml/2006/main">
+  <p:cSld>
+    <p:spTree>
+      <p:nvGrpSpPr>
+        <p:cNvPr id="1" name="">
+          <a:extLst>
+            <a:ext uri="{FF2B5EF4-FFF2-40B4-BE49-F238E27FC236}">
               <a16:creationId xmlns:a16="http://schemas.microsoft.com/office/drawing/2014/main" id="{77EEB3C7-BC59-085B-9DA8-16AA052F8DAA}"/>
             </a:ext>
           </a:extLst>
